--- a/docs/architecture.pptx
+++ b/docs/architecture.pptx
@@ -16,6 +16,7 @@
     <p:sldId id="264" r:id="rId15"/>
     <p:sldId id="265" r:id="rId16"/>
     <p:sldId id="266" r:id="rId17"/>
+    <p:sldId id="267" r:id="rId18"/>
   </p:sldIdLst>
   <p:sldSz cx="12191695" cy="6858000" type="screen4x3"/>
   <p:notesSz cx="6858000" cy="9144000"/>
@@ -2872,7 +2873,7 @@
           <a:lstStyle/>
           <a:p>
             <a:pPr algn="r"/>
-            <a:fld id="{5FFEB6E0-DF3C-41E8-AD19-C6C3A8866004}" type="slidenum">
+            <a:fld id="{1CF40720-7B4F-485C-B2CB-906E457782F0}" type="slidenum">
               <a:rPr lang="ja-JP" sz="1300" b="0">
                 <a:solidFill>
                   <a:srgbClr val="222222"/>
@@ -3649,7 +3650,7 @@
                 <a:latin typeface="メイリオ"/>
                 <a:ea typeface="メイリオ"/>
               </a:rPr>
-              <a:t>制約・</a:t>
+              <a:t>ファイル</a:t>
             </a:r>
           </a:p>
           <a:p>
@@ -3662,7 +3663,7 @@
                 <a:latin typeface="メイリオ"/>
                 <a:ea typeface="メイリオ"/>
               </a:rPr>
-              <a:t>リスク</a:t>
+              <a:t>構造</a:t>
             </a:r>
           </a:p>
         </p:txBody>
@@ -3698,7 +3699,7 @@
                 <a:latin typeface="メイリオ"/>
                 <a:ea typeface="メイリオ"/>
               </a:rPr>
-              <a:t>情報源・配信の制約</a:t>
+              <a:t>リポジトリ構成</a:t>
             </a:r>
           </a:p>
         </p:txBody>
@@ -3733,7 +3734,7 @@
                 <a:latin typeface="メイリオ"/>
                 <a:ea typeface="メイリオ"/>
               </a:rPr>
-              <a:t>■ 情報源・配信の制約</a:t>
+              <a:t>■ リポジトリ構成</a:t>
             </a:r>
           </a:p>
         </p:txBody>
@@ -3778,7 +3779,7 @@
                 <a:latin typeface="メイリオ"/>
                 <a:ea typeface="メイリオ"/>
               </a:rPr>
-              <a:t>NewsPicks 有料記事は認証ゲートのため公開部分のみ参照</a:t>
+              <a:t>digest/{FX,AI,IT-Consulting,Economy,Game}/ — カテゴリ別フォルダで管理</a:t>
             </a:r>
           </a:p>
           <a:p>
@@ -3800,7 +3801,7 @@
                 <a:latin typeface="メイリオ"/>
                 <a:ea typeface="メイリオ"/>
               </a:rPr>
-              <a:t>NRI 宛メール（h2-hiramatsu@nri.co.jp）は外部メールフィルタで弾かれる可能性</a:t>
+              <a:t>digest/Summary/ — 日次サマリー（テーマ考察ハブ）</a:t>
             </a:r>
           </a:p>
           <a:p>
@@ -3822,195 +3823,9 @@
                 <a:latin typeface="メイリオ"/>
                 <a:ea typeface="メイリオ"/>
               </a:rPr>
-              <a:t>→ 不達時は hideki.kusunoki@gmail.com で受信し、必要時に手動転送</a:t>
-            </a:r>
-          </a:p>
-        </p:txBody>
-      </p:sp>
-      <p:sp>
-        <p:nvSpPr>
-          <p:cNvPr id="10" name="Rectangle 9"/>
-          <p:cNvSpPr/>
-          <p:nvPr/>
-        </p:nvSpPr>
-        <p:spPr>
-          <a:xfrm>
-            <a:off x="457200" y="3886200"/>
-            <a:ext cx="2926080" cy="2331720"/>
-          </a:xfrm>
-          <a:prstGeom prst="rect">
-            <a:avLst/>
-          </a:prstGeom>
-          <a:solidFill>
-            <a:srgbClr val="162B5C"/>
-          </a:solidFill>
-          <a:ln>
-            <a:noFill/>
-          </a:ln>
-        </p:spPr>
-        <p:style>
-          <a:lnRef idx="1">
-            <a:schemeClr val="accent1"/>
-          </a:lnRef>
-          <a:fillRef idx="3">
-            <a:schemeClr val="accent1"/>
-          </a:fillRef>
-          <a:effectRef idx="2">
-            <a:schemeClr val="accent1"/>
-          </a:effectRef>
-          <a:fontRef idx="minor">
-            <a:schemeClr val="lt1"/>
-          </a:fontRef>
-        </p:style>
-        <p:txBody>
-          <a:bodyPr rtlCol="0" anchor="ctr"/>
-          <a:lstStyle/>
-          <a:p>
-            <a:pPr algn="ctr"/>
-          </a:p>
-        </p:txBody>
-      </p:sp>
-      <p:sp>
-        <p:nvSpPr>
-          <p:cNvPr id="11" name="TextBox 10"/>
-          <p:cNvSpPr txBox="1"/>
-          <p:nvPr/>
-        </p:nvSpPr>
-        <p:spPr>
-          <a:xfrm>
-            <a:off x="640080" y="4069080"/>
-            <a:ext cx="2560320" cy="1965960"/>
-          </a:xfrm>
-          <a:prstGeom prst="rect">
-            <a:avLst/>
-          </a:prstGeom>
-          <a:noFill/>
-        </p:spPr>
-        <p:txBody>
-          <a:bodyPr wrap="square" lIns="0" rIns="0" tIns="0" bIns="0" anchor="ctr">
-            <a:spAutoFit/>
-          </a:bodyPr>
-          <a:lstStyle/>
-          <a:p>
-            <a:pPr algn="ctr"/>
-            <a:r>
-              <a:rPr b="1" sz="2200">
-                <a:solidFill>
-                  <a:srgbClr val="FFFFFF"/>
-                </a:solidFill>
-                <a:latin typeface="メイリオ"/>
-                <a:ea typeface="メイリオ"/>
-              </a:rPr>
-              <a:t>制約・</a:t>
-            </a:r>
-          </a:p>
-          <a:p>
-            <a:pPr algn="ctr"/>
-            <a:r>
-              <a:rPr b="1" sz="2200">
-                <a:solidFill>
-                  <a:srgbClr val="FFFFFF"/>
-                </a:solidFill>
-                <a:latin typeface="メイリオ"/>
-                <a:ea typeface="メイリオ"/>
-              </a:rPr>
-              <a:t>リスク</a:t>
-            </a:r>
-          </a:p>
-        </p:txBody>
-      </p:sp>
-      <p:sp>
-        <p:nvSpPr>
-          <p:cNvPr id="12" name="TextBox 11"/>
-          <p:cNvSpPr txBox="1"/>
-          <p:nvPr/>
-        </p:nvSpPr>
-        <p:spPr>
-          <a:xfrm>
-            <a:off x="640080" y="5760720"/>
-            <a:ext cx="2560320" cy="365760"/>
-          </a:xfrm>
-          <a:prstGeom prst="rect">
-            <a:avLst/>
-          </a:prstGeom>
-          <a:noFill/>
-        </p:spPr>
-        <p:txBody>
-          <a:bodyPr wrap="square" lIns="0" rIns="0" tIns="0" bIns="0">
-            <a:spAutoFit/>
-          </a:bodyPr>
-          <a:lstStyle/>
-          <a:p>
-            <a:pPr algn="ctr"/>
-            <a:r>
-              <a:rPr b="1" sz="1700">
-                <a:solidFill>
-                  <a:srgbClr val="D9E7F5"/>
-                </a:solidFill>
-                <a:latin typeface="メイリオ"/>
-                <a:ea typeface="メイリオ"/>
-              </a:rPr>
-              <a:t>運用上の依存・恒久ルール</a:t>
-            </a:r>
-          </a:p>
-        </p:txBody>
-      </p:sp>
-      <p:sp>
-        <p:nvSpPr>
-          <p:cNvPr id="13" name="TextBox 12"/>
-          <p:cNvSpPr txBox="1"/>
-          <p:nvPr/>
-        </p:nvSpPr>
-        <p:spPr>
-          <a:xfrm>
-            <a:off x="3703320" y="3931920"/>
-            <a:ext cx="8031175" cy="457200"/>
-          </a:xfrm>
-          <a:prstGeom prst="rect">
-            <a:avLst/>
-          </a:prstGeom>
-          <a:noFill/>
-        </p:spPr>
-        <p:txBody>
-          <a:bodyPr wrap="square" lIns="0" rIns="0" tIns="0" bIns="0">
-            <a:spAutoFit/>
-          </a:bodyPr>
-          <a:lstStyle/>
-          <a:p>
-            <a:r>
-              <a:rPr b="1" sz="2200">
-                <a:solidFill>
-                  <a:srgbClr val="1F3A7A"/>
-                </a:solidFill>
-                <a:latin typeface="メイリオ"/>
-                <a:ea typeface="メイリオ"/>
-              </a:rPr>
-              <a:t>■ 運用上の依存・恒久ルール</a:t>
-            </a:r>
-          </a:p>
-        </p:txBody>
-      </p:sp>
-      <p:sp>
-        <p:nvSpPr>
-          <p:cNvPr id="14" name="TextBox 13"/>
-          <p:cNvSpPr txBox="1"/>
-          <p:nvPr/>
-        </p:nvSpPr>
-        <p:spPr>
-          <a:xfrm>
-            <a:off x="3703320" y="4434840"/>
-            <a:ext cx="8031175" cy="1691639"/>
-          </a:xfrm>
-          <a:prstGeom prst="rect">
-            <a:avLst/>
-          </a:prstGeom>
-          <a:noFill/>
-        </p:spPr>
-        <p:txBody>
-          <a:bodyPr wrap="square" lIns="0" rIns="0" tIns="0" bIns="0">
-            <a:spAutoFit/>
-          </a:bodyPr>
-          <a:lstStyle/>
+              <a:t>data/watchlist.md — ★ ユーザー編集可、トラッキング対象一覧</a:t>
+            </a:r>
+          </a:p>
           <a:p>
             <a:pPr marL="228600" indent="-228600">
               <a:buClr>
@@ -4030,7 +3845,7 @@
                 <a:latin typeface="メイリオ"/>
                 <a:ea typeface="メイリオ"/>
               </a:rPr>
-              <a:t>Max サブスクの 5h 枠を朝 6 時に消費（日中の作業と時間帯競合させない）</a:t>
+              <a:t>data/articles.jsonl — 過去 90 日の記事メタ（自動ローテート、entities/topics/tags 拡張済み）</a:t>
             </a:r>
           </a:p>
           <a:p>
@@ -4052,7 +3867,7 @@
                 <a:latin typeface="メイリオ"/>
                 <a:ea typeface="メイリオ"/>
               </a:rPr>
-              <a:t>PC オン時に Runner が動く前提（土日 PC オフだとその日はスキップされる）</a:t>
+              <a:t>prompts/routine-system.md / obsidian-tagging-spec.md / email-template.html / obsidian-template.md</a:t>
             </a:r>
           </a:p>
           <a:p>
@@ -4074,9 +3889,195 @@
                 <a:latin typeface="メイリオ"/>
                 <a:ea typeface="メイリオ"/>
               </a:rPr>
-              <a:t>Windows .bat は CRLF 必須・ASCII のみ・goto 構造（feedback memory に恒久ルール記録済み）</a:t>
-            </a:r>
-          </a:p>
+              <a:t>assets/ng-thumb-{cat}.jpg + ng-thumb-common-{cat}.jpg（v2 Claude Design 提供 10 枚）</a:t>
+            </a:r>
+          </a:p>
+        </p:txBody>
+      </p:sp>
+      <p:sp>
+        <p:nvSpPr>
+          <p:cNvPr id="10" name="Rectangle 9"/>
+          <p:cNvSpPr/>
+          <p:nvPr/>
+        </p:nvSpPr>
+        <p:spPr>
+          <a:xfrm>
+            <a:off x="457200" y="3886200"/>
+            <a:ext cx="2926080" cy="2331720"/>
+          </a:xfrm>
+          <a:prstGeom prst="rect">
+            <a:avLst/>
+          </a:prstGeom>
+          <a:solidFill>
+            <a:srgbClr val="162B5C"/>
+          </a:solidFill>
+          <a:ln>
+            <a:noFill/>
+          </a:ln>
+        </p:spPr>
+        <p:style>
+          <a:lnRef idx="1">
+            <a:schemeClr val="accent1"/>
+          </a:lnRef>
+          <a:fillRef idx="3">
+            <a:schemeClr val="accent1"/>
+          </a:fillRef>
+          <a:effectRef idx="2">
+            <a:schemeClr val="accent1"/>
+          </a:effectRef>
+          <a:fontRef idx="minor">
+            <a:schemeClr val="lt1"/>
+          </a:fontRef>
+        </p:style>
+        <p:txBody>
+          <a:bodyPr rtlCol="0" anchor="ctr"/>
+          <a:lstStyle/>
+          <a:p>
+            <a:pPr algn="ctr"/>
+          </a:p>
+        </p:txBody>
+      </p:sp>
+      <p:sp>
+        <p:nvSpPr>
+          <p:cNvPr id="11" name="TextBox 10"/>
+          <p:cNvSpPr txBox="1"/>
+          <p:nvPr/>
+        </p:nvSpPr>
+        <p:spPr>
+          <a:xfrm>
+            <a:off x="640080" y="4069080"/>
+            <a:ext cx="2560320" cy="1965960"/>
+          </a:xfrm>
+          <a:prstGeom prst="rect">
+            <a:avLst/>
+          </a:prstGeom>
+          <a:noFill/>
+        </p:spPr>
+        <p:txBody>
+          <a:bodyPr wrap="square" lIns="0" rIns="0" tIns="0" bIns="0" anchor="ctr">
+            <a:spAutoFit/>
+          </a:bodyPr>
+          <a:lstStyle/>
+          <a:p>
+            <a:pPr algn="ctr"/>
+            <a:r>
+              <a:rPr b="1" sz="2200">
+                <a:solidFill>
+                  <a:srgbClr val="FFFFFF"/>
+                </a:solidFill>
+                <a:latin typeface="メイリオ"/>
+                <a:ea typeface="メイリオ"/>
+              </a:rPr>
+              <a:t>ファイル</a:t>
+            </a:r>
+          </a:p>
+          <a:p>
+            <a:pPr algn="ctr"/>
+            <a:r>
+              <a:rPr b="1" sz="2200">
+                <a:solidFill>
+                  <a:srgbClr val="FFFFFF"/>
+                </a:solidFill>
+                <a:latin typeface="メイリオ"/>
+                <a:ea typeface="メイリオ"/>
+              </a:rPr>
+              <a:t>構造</a:t>
+            </a:r>
+          </a:p>
+        </p:txBody>
+      </p:sp>
+      <p:sp>
+        <p:nvSpPr>
+          <p:cNvPr id="12" name="TextBox 11"/>
+          <p:cNvSpPr txBox="1"/>
+          <p:nvPr/>
+        </p:nvSpPr>
+        <p:spPr>
+          <a:xfrm>
+            <a:off x="640080" y="5760720"/>
+            <a:ext cx="2560320" cy="365760"/>
+          </a:xfrm>
+          <a:prstGeom prst="rect">
+            <a:avLst/>
+          </a:prstGeom>
+          <a:noFill/>
+        </p:spPr>
+        <p:txBody>
+          <a:bodyPr wrap="square" lIns="0" rIns="0" tIns="0" bIns="0">
+            <a:spAutoFit/>
+          </a:bodyPr>
+          <a:lstStyle/>
+          <a:p>
+            <a:pPr algn="ctr"/>
+            <a:r>
+              <a:rPr b="1" sz="1700">
+                <a:solidFill>
+                  <a:srgbClr val="D9E7F5"/>
+                </a:solidFill>
+                <a:latin typeface="メイリオ"/>
+                <a:ea typeface="メイリオ"/>
+              </a:rPr>
+              <a:t>単体テスト機構</a:t>
+            </a:r>
+          </a:p>
+        </p:txBody>
+      </p:sp>
+      <p:sp>
+        <p:nvSpPr>
+          <p:cNvPr id="13" name="TextBox 12"/>
+          <p:cNvSpPr txBox="1"/>
+          <p:nvPr/>
+        </p:nvSpPr>
+        <p:spPr>
+          <a:xfrm>
+            <a:off x="3703320" y="3931920"/>
+            <a:ext cx="8031175" cy="457200"/>
+          </a:xfrm>
+          <a:prstGeom prst="rect">
+            <a:avLst/>
+          </a:prstGeom>
+          <a:noFill/>
+        </p:spPr>
+        <p:txBody>
+          <a:bodyPr wrap="square" lIns="0" rIns="0" tIns="0" bIns="0">
+            <a:spAutoFit/>
+          </a:bodyPr>
+          <a:lstStyle/>
+          <a:p>
+            <a:r>
+              <a:rPr b="1" sz="2200">
+                <a:solidFill>
+                  <a:srgbClr val="1F3A7A"/>
+                </a:solidFill>
+                <a:latin typeface="メイリオ"/>
+                <a:ea typeface="メイリオ"/>
+              </a:rPr>
+              <a:t>■ 単体テスト機構</a:t>
+            </a:r>
+          </a:p>
+        </p:txBody>
+      </p:sp>
+      <p:sp>
+        <p:nvSpPr>
+          <p:cNvPr id="14" name="TextBox 13"/>
+          <p:cNvSpPr txBox="1"/>
+          <p:nvPr/>
+        </p:nvSpPr>
+        <p:spPr>
+          <a:xfrm>
+            <a:off x="3703320" y="4434840"/>
+            <a:ext cx="8031175" cy="1691639"/>
+          </a:xfrm>
+          <a:prstGeom prst="rect">
+            <a:avLst/>
+          </a:prstGeom>
+          <a:noFill/>
+        </p:spPr>
+        <p:txBody>
+          <a:bodyPr wrap="square" lIns="0" rIns="0" tIns="0" bIns="0">
+            <a:spAutoFit/>
+          </a:bodyPr>
+          <a:lstStyle/>
           <a:p>
             <a:pPr marL="228600" indent="-228600">
               <a:buClr>
@@ -4096,7 +4097,73 @@
                 <a:latin typeface="メイリオ"/>
                 <a:ea typeface="メイリオ"/>
               </a:rPr>
-              <a:t>メール HTML 内画像は base64 inline 必須（private repo の raw URL は受信側からアクセス不可）</a:t>
+              <a:t>tests/render_email.py — Claude を呼ばずに HTML テンプレートだけ確認</a:t>
+            </a:r>
+          </a:p>
+          <a:p>
+            <a:pPr marL="228600" indent="-228600">
+              <a:buClr>
+                <a:srgbClr val="222222"/>
+              </a:buClr>
+              <a:lnSpc>
+                <a:spcPct val="140000"/>
+              </a:lnSpc>
+              <a:buFont typeface="Arial"/>
+              <a:buChar char="●"/>
+            </a:pPr>
+            <a:r>
+              <a:rPr b="0" sz="1800">
+                <a:solidFill>
+                  <a:srgbClr val="222222"/>
+                </a:solidFill>
+                <a:latin typeface="メイリオ"/>
+                <a:ea typeface="メイリオ"/>
+              </a:rPr>
+              <a:t>A) python tests/render_email.py — preview.html 生成（$0 / 1-2 秒）</a:t>
+            </a:r>
+          </a:p>
+          <a:p>
+            <a:pPr marL="228600" indent="-228600">
+              <a:buClr>
+                <a:srgbClr val="222222"/>
+              </a:buClr>
+              <a:lnSpc>
+                <a:spcPct val="140000"/>
+              </a:lnSpc>
+              <a:buFont typeface="Arial"/>
+              <a:buChar char="●"/>
+            </a:pPr>
+            <a:r>
+              <a:rPr b="0" sz="1800">
+                <a:solidFill>
+                  <a:srgbClr val="222222"/>
+                </a:solidFill>
+                <a:latin typeface="メイリオ"/>
+                <a:ea typeface="メイリオ"/>
+              </a:rPr>
+              <a:t>C) python tests/render_email.py --send — Webhook 経由で実送信（$0 / 5-10 秒）</a:t>
+            </a:r>
+          </a:p>
+          <a:p>
+            <a:pPr marL="228600" indent="-228600">
+              <a:buClr>
+                <a:srgbClr val="222222"/>
+              </a:buClr>
+              <a:lnSpc>
+                <a:spcPct val="140000"/>
+              </a:lnSpc>
+              <a:buFont typeface="Arial"/>
+              <a:buChar char="●"/>
+            </a:pPr>
+            <a:r>
+              <a:rPr b="0" sz="1800">
+                <a:solidFill>
+                  <a:srgbClr val="222222"/>
+                </a:solidFill>
+                <a:latin typeface="メイリオ"/>
+                <a:ea typeface="メイリオ"/>
+              </a:rPr>
+              <a:t>tests/mock_data.py に 5 カテゴリ × 5 件のサンプル（強調記法 [[]] / __ 含む）</a:t>
             </a:r>
           </a:p>
         </p:txBody>
@@ -4121,6 +4188,668 @@
       <p:grpSpPr/>
       <p:sp>
         <p:nvSpPr>
+          <p:cNvPr id="2" name="Rectangle 1"/>
+          <p:cNvSpPr/>
+          <p:nvPr/>
+        </p:nvSpPr>
+        <p:spPr>
+          <a:xfrm>
+            <a:off x="457200" y="365760"/>
+            <a:ext cx="45720" cy="548640"/>
+          </a:xfrm>
+          <a:prstGeom prst="rect">
+            <a:avLst/>
+          </a:prstGeom>
+          <a:solidFill>
+            <a:srgbClr val="1F3A7A"/>
+          </a:solidFill>
+          <a:ln>
+            <a:noFill/>
+          </a:ln>
+        </p:spPr>
+        <p:style>
+          <a:lnRef idx="1">
+            <a:schemeClr val="accent1"/>
+          </a:lnRef>
+          <a:fillRef idx="3">
+            <a:schemeClr val="accent1"/>
+          </a:fillRef>
+          <a:effectRef idx="2">
+            <a:schemeClr val="accent1"/>
+          </a:effectRef>
+          <a:fontRef idx="minor">
+            <a:schemeClr val="lt1"/>
+          </a:fontRef>
+        </p:style>
+        <p:txBody>
+          <a:bodyPr rtlCol="0" anchor="ctr"/>
+          <a:lstStyle/>
+          <a:p>
+            <a:pPr algn="ctr"/>
+          </a:p>
+        </p:txBody>
+      </p:sp>
+      <p:sp>
+        <p:nvSpPr>
+          <p:cNvPr id="3" name="TextBox 2"/>
+          <p:cNvSpPr txBox="1"/>
+          <p:nvPr/>
+        </p:nvSpPr>
+        <p:spPr>
+          <a:xfrm>
+            <a:off x="621792" y="338328"/>
+            <a:ext cx="11094415" cy="228600"/>
+          </a:xfrm>
+          <a:prstGeom prst="rect">
+            <a:avLst/>
+          </a:prstGeom>
+          <a:noFill/>
+        </p:spPr>
+        <p:txBody>
+          <a:bodyPr wrap="square" lIns="0" rIns="0" tIns="0" bIns="0">
+            <a:spAutoFit/>
+          </a:bodyPr>
+          <a:lstStyle/>
+          <a:p>
+            <a:r>
+              <a:rPr b="1" sz="1700">
+                <a:solidFill>
+                  <a:srgbClr val="1F3A7A"/>
+                </a:solidFill>
+                <a:latin typeface="メイリオ"/>
+                <a:ea typeface="メイリオ"/>
+              </a:rPr>
+              <a:t>業績ポイント</a:t>
+            </a:r>
+          </a:p>
+        </p:txBody>
+      </p:sp>
+      <p:sp>
+        <p:nvSpPr>
+          <p:cNvPr id="4" name="TextBox 3"/>
+          <p:cNvSpPr txBox="1"/>
+          <p:nvPr/>
+        </p:nvSpPr>
+        <p:spPr>
+          <a:xfrm>
+            <a:off x="621792" y="548640"/>
+            <a:ext cx="11094415" cy="457200"/>
+          </a:xfrm>
+          <a:prstGeom prst="rect">
+            <a:avLst/>
+          </a:prstGeom>
+          <a:noFill/>
+        </p:spPr>
+        <p:txBody>
+          <a:bodyPr wrap="square" lIns="0" rIns="0" tIns="0" bIns="0">
+            <a:spAutoFit/>
+          </a:bodyPr>
+          <a:lstStyle/>
+          <a:p>
+            <a:pPr>
+              <a:lnSpc>
+                <a:spcPct val="105000"/>
+              </a:lnSpc>
+            </a:pPr>
+            <a:r>
+              <a:rPr b="1" sz="3000">
+                <a:solidFill>
+                  <a:srgbClr val="1F3A7A"/>
+                </a:solidFill>
+                <a:latin typeface="メイリオ"/>
+                <a:ea typeface="メイリオ"/>
+              </a:rPr>
+              <a:t>POINTS</a:t>
+            </a:r>
+          </a:p>
+        </p:txBody>
+      </p:sp>
+      <p:sp>
+        <p:nvSpPr>
+          <p:cNvPr id="5" name="Rectangle 4"/>
+          <p:cNvSpPr/>
+          <p:nvPr/>
+        </p:nvSpPr>
+        <p:spPr>
+          <a:xfrm>
+            <a:off x="457200" y="1280160"/>
+            <a:ext cx="2926080" cy="2331720"/>
+          </a:xfrm>
+          <a:prstGeom prst="rect">
+            <a:avLst/>
+          </a:prstGeom>
+          <a:solidFill>
+            <a:srgbClr val="162B5C"/>
+          </a:solidFill>
+          <a:ln>
+            <a:noFill/>
+          </a:ln>
+        </p:spPr>
+        <p:style>
+          <a:lnRef idx="1">
+            <a:schemeClr val="accent1"/>
+          </a:lnRef>
+          <a:fillRef idx="3">
+            <a:schemeClr val="accent1"/>
+          </a:fillRef>
+          <a:effectRef idx="2">
+            <a:schemeClr val="accent1"/>
+          </a:effectRef>
+          <a:fontRef idx="minor">
+            <a:schemeClr val="lt1"/>
+          </a:fontRef>
+        </p:style>
+        <p:txBody>
+          <a:bodyPr rtlCol="0" anchor="ctr"/>
+          <a:lstStyle/>
+          <a:p>
+            <a:pPr algn="ctr"/>
+          </a:p>
+        </p:txBody>
+      </p:sp>
+      <p:sp>
+        <p:nvSpPr>
+          <p:cNvPr id="6" name="TextBox 5"/>
+          <p:cNvSpPr txBox="1"/>
+          <p:nvPr/>
+        </p:nvSpPr>
+        <p:spPr>
+          <a:xfrm>
+            <a:off x="640080" y="1463039"/>
+            <a:ext cx="2560320" cy="1965960"/>
+          </a:xfrm>
+          <a:prstGeom prst="rect">
+            <a:avLst/>
+          </a:prstGeom>
+          <a:noFill/>
+        </p:spPr>
+        <p:txBody>
+          <a:bodyPr wrap="square" lIns="0" rIns="0" tIns="0" bIns="0" anchor="ctr">
+            <a:spAutoFit/>
+          </a:bodyPr>
+          <a:lstStyle/>
+          <a:p>
+            <a:pPr algn="ctr"/>
+            <a:r>
+              <a:rPr b="1" sz="2200">
+                <a:solidFill>
+                  <a:srgbClr val="FFFFFF"/>
+                </a:solidFill>
+                <a:latin typeface="メイリオ"/>
+                <a:ea typeface="メイリオ"/>
+              </a:rPr>
+              <a:t>制約・</a:t>
+            </a:r>
+          </a:p>
+          <a:p>
+            <a:pPr algn="ctr"/>
+            <a:r>
+              <a:rPr b="1" sz="2200">
+                <a:solidFill>
+                  <a:srgbClr val="FFFFFF"/>
+                </a:solidFill>
+                <a:latin typeface="メイリオ"/>
+                <a:ea typeface="メイリオ"/>
+              </a:rPr>
+              <a:t>リスク</a:t>
+            </a:r>
+          </a:p>
+        </p:txBody>
+      </p:sp>
+      <p:sp>
+        <p:nvSpPr>
+          <p:cNvPr id="7" name="TextBox 6"/>
+          <p:cNvSpPr txBox="1"/>
+          <p:nvPr/>
+        </p:nvSpPr>
+        <p:spPr>
+          <a:xfrm>
+            <a:off x="640080" y="3154679"/>
+            <a:ext cx="2560320" cy="365760"/>
+          </a:xfrm>
+          <a:prstGeom prst="rect">
+            <a:avLst/>
+          </a:prstGeom>
+          <a:noFill/>
+        </p:spPr>
+        <p:txBody>
+          <a:bodyPr wrap="square" lIns="0" rIns="0" tIns="0" bIns="0">
+            <a:spAutoFit/>
+          </a:bodyPr>
+          <a:lstStyle/>
+          <a:p>
+            <a:pPr algn="ctr"/>
+            <a:r>
+              <a:rPr b="1" sz="1700">
+                <a:solidFill>
+                  <a:srgbClr val="D9E7F5"/>
+                </a:solidFill>
+                <a:latin typeface="メイリオ"/>
+                <a:ea typeface="メイリオ"/>
+              </a:rPr>
+              <a:t>情報源・配信の制約</a:t>
+            </a:r>
+          </a:p>
+        </p:txBody>
+      </p:sp>
+      <p:sp>
+        <p:nvSpPr>
+          <p:cNvPr id="8" name="TextBox 7"/>
+          <p:cNvSpPr txBox="1"/>
+          <p:nvPr/>
+        </p:nvSpPr>
+        <p:spPr>
+          <a:xfrm>
+            <a:off x="3703320" y="1325880"/>
+            <a:ext cx="8031175" cy="457200"/>
+          </a:xfrm>
+          <a:prstGeom prst="rect">
+            <a:avLst/>
+          </a:prstGeom>
+          <a:noFill/>
+        </p:spPr>
+        <p:txBody>
+          <a:bodyPr wrap="square" lIns="0" rIns="0" tIns="0" bIns="0">
+            <a:spAutoFit/>
+          </a:bodyPr>
+          <a:lstStyle/>
+          <a:p>
+            <a:r>
+              <a:rPr b="1" sz="2200">
+                <a:solidFill>
+                  <a:srgbClr val="1F3A7A"/>
+                </a:solidFill>
+                <a:latin typeface="メイリオ"/>
+                <a:ea typeface="メイリオ"/>
+              </a:rPr>
+              <a:t>■ 情報源・配信の制約</a:t>
+            </a:r>
+          </a:p>
+        </p:txBody>
+      </p:sp>
+      <p:sp>
+        <p:nvSpPr>
+          <p:cNvPr id="9" name="TextBox 8"/>
+          <p:cNvSpPr txBox="1"/>
+          <p:nvPr/>
+        </p:nvSpPr>
+        <p:spPr>
+          <a:xfrm>
+            <a:off x="3703320" y="1828800"/>
+            <a:ext cx="8031175" cy="1691639"/>
+          </a:xfrm>
+          <a:prstGeom prst="rect">
+            <a:avLst/>
+          </a:prstGeom>
+          <a:noFill/>
+        </p:spPr>
+        <p:txBody>
+          <a:bodyPr wrap="square" lIns="0" rIns="0" tIns="0" bIns="0">
+            <a:spAutoFit/>
+          </a:bodyPr>
+          <a:lstStyle/>
+          <a:p>
+            <a:pPr marL="228600" indent="-228600">
+              <a:buClr>
+                <a:srgbClr val="222222"/>
+              </a:buClr>
+              <a:lnSpc>
+                <a:spcPct val="140000"/>
+              </a:lnSpc>
+              <a:buFont typeface="Arial"/>
+              <a:buChar char="●"/>
+            </a:pPr>
+            <a:r>
+              <a:rPr b="0" sz="1800">
+                <a:solidFill>
+                  <a:srgbClr val="222222"/>
+                </a:solidFill>
+                <a:latin typeface="メイリオ"/>
+                <a:ea typeface="メイリオ"/>
+              </a:rPr>
+              <a:t>NewsPicks 有料記事は認証ゲートのため公開部分のみ参照</a:t>
+            </a:r>
+          </a:p>
+          <a:p>
+            <a:pPr marL="228600" indent="-228600">
+              <a:buClr>
+                <a:srgbClr val="222222"/>
+              </a:buClr>
+              <a:lnSpc>
+                <a:spcPct val="140000"/>
+              </a:lnSpc>
+              <a:buFont typeface="Arial"/>
+              <a:buChar char="●"/>
+            </a:pPr>
+            <a:r>
+              <a:rPr b="0" sz="1800">
+                <a:solidFill>
+                  <a:srgbClr val="222222"/>
+                </a:solidFill>
+                <a:latin typeface="メイリオ"/>
+                <a:ea typeface="メイリオ"/>
+              </a:rPr>
+              <a:t>NRI 宛メール（h2-hiramatsu@nri.co.jp）は外部メールフィルタで弾かれる可能性</a:t>
+            </a:r>
+          </a:p>
+          <a:p>
+            <a:pPr marL="228600" indent="-228600">
+              <a:buClr>
+                <a:srgbClr val="222222"/>
+              </a:buClr>
+              <a:lnSpc>
+                <a:spcPct val="140000"/>
+              </a:lnSpc>
+              <a:buFont typeface="Arial"/>
+              <a:buChar char="●"/>
+            </a:pPr>
+            <a:r>
+              <a:rPr b="0" sz="1800">
+                <a:solidFill>
+                  <a:srgbClr val="222222"/>
+                </a:solidFill>
+                <a:latin typeface="メイリオ"/>
+                <a:ea typeface="メイリオ"/>
+              </a:rPr>
+              <a:t>→ 不達時は hideki.kusunoki@gmail.com で受信し、必要時に手動転送</a:t>
+            </a:r>
+          </a:p>
+        </p:txBody>
+      </p:sp>
+      <p:sp>
+        <p:nvSpPr>
+          <p:cNvPr id="10" name="Rectangle 9"/>
+          <p:cNvSpPr/>
+          <p:nvPr/>
+        </p:nvSpPr>
+        <p:spPr>
+          <a:xfrm>
+            <a:off x="457200" y="3886200"/>
+            <a:ext cx="2926080" cy="2331720"/>
+          </a:xfrm>
+          <a:prstGeom prst="rect">
+            <a:avLst/>
+          </a:prstGeom>
+          <a:solidFill>
+            <a:srgbClr val="162B5C"/>
+          </a:solidFill>
+          <a:ln>
+            <a:noFill/>
+          </a:ln>
+        </p:spPr>
+        <p:style>
+          <a:lnRef idx="1">
+            <a:schemeClr val="accent1"/>
+          </a:lnRef>
+          <a:fillRef idx="3">
+            <a:schemeClr val="accent1"/>
+          </a:fillRef>
+          <a:effectRef idx="2">
+            <a:schemeClr val="accent1"/>
+          </a:effectRef>
+          <a:fontRef idx="minor">
+            <a:schemeClr val="lt1"/>
+          </a:fontRef>
+        </p:style>
+        <p:txBody>
+          <a:bodyPr rtlCol="0" anchor="ctr"/>
+          <a:lstStyle/>
+          <a:p>
+            <a:pPr algn="ctr"/>
+          </a:p>
+        </p:txBody>
+      </p:sp>
+      <p:sp>
+        <p:nvSpPr>
+          <p:cNvPr id="11" name="TextBox 10"/>
+          <p:cNvSpPr txBox="1"/>
+          <p:nvPr/>
+        </p:nvSpPr>
+        <p:spPr>
+          <a:xfrm>
+            <a:off x="640080" y="4069080"/>
+            <a:ext cx="2560320" cy="1965960"/>
+          </a:xfrm>
+          <a:prstGeom prst="rect">
+            <a:avLst/>
+          </a:prstGeom>
+          <a:noFill/>
+        </p:spPr>
+        <p:txBody>
+          <a:bodyPr wrap="square" lIns="0" rIns="0" tIns="0" bIns="0" anchor="ctr">
+            <a:spAutoFit/>
+          </a:bodyPr>
+          <a:lstStyle/>
+          <a:p>
+            <a:pPr algn="ctr"/>
+            <a:r>
+              <a:rPr b="1" sz="2200">
+                <a:solidFill>
+                  <a:srgbClr val="FFFFFF"/>
+                </a:solidFill>
+                <a:latin typeface="メイリオ"/>
+                <a:ea typeface="メイリオ"/>
+              </a:rPr>
+              <a:t>制約・</a:t>
+            </a:r>
+          </a:p>
+          <a:p>
+            <a:pPr algn="ctr"/>
+            <a:r>
+              <a:rPr b="1" sz="2200">
+                <a:solidFill>
+                  <a:srgbClr val="FFFFFF"/>
+                </a:solidFill>
+                <a:latin typeface="メイリオ"/>
+                <a:ea typeface="メイリオ"/>
+              </a:rPr>
+              <a:t>リスク</a:t>
+            </a:r>
+          </a:p>
+        </p:txBody>
+      </p:sp>
+      <p:sp>
+        <p:nvSpPr>
+          <p:cNvPr id="12" name="TextBox 11"/>
+          <p:cNvSpPr txBox="1"/>
+          <p:nvPr/>
+        </p:nvSpPr>
+        <p:spPr>
+          <a:xfrm>
+            <a:off x="640080" y="5760720"/>
+            <a:ext cx="2560320" cy="365760"/>
+          </a:xfrm>
+          <a:prstGeom prst="rect">
+            <a:avLst/>
+          </a:prstGeom>
+          <a:noFill/>
+        </p:spPr>
+        <p:txBody>
+          <a:bodyPr wrap="square" lIns="0" rIns="0" tIns="0" bIns="0">
+            <a:spAutoFit/>
+          </a:bodyPr>
+          <a:lstStyle/>
+          <a:p>
+            <a:pPr algn="ctr"/>
+            <a:r>
+              <a:rPr b="1" sz="1700">
+                <a:solidFill>
+                  <a:srgbClr val="D9E7F5"/>
+                </a:solidFill>
+                <a:latin typeface="メイリオ"/>
+                <a:ea typeface="メイリオ"/>
+              </a:rPr>
+              <a:t>運用上の依存・恒久ルール</a:t>
+            </a:r>
+          </a:p>
+        </p:txBody>
+      </p:sp>
+      <p:sp>
+        <p:nvSpPr>
+          <p:cNvPr id="13" name="TextBox 12"/>
+          <p:cNvSpPr txBox="1"/>
+          <p:nvPr/>
+        </p:nvSpPr>
+        <p:spPr>
+          <a:xfrm>
+            <a:off x="3703320" y="3931920"/>
+            <a:ext cx="8031175" cy="457200"/>
+          </a:xfrm>
+          <a:prstGeom prst="rect">
+            <a:avLst/>
+          </a:prstGeom>
+          <a:noFill/>
+        </p:spPr>
+        <p:txBody>
+          <a:bodyPr wrap="square" lIns="0" rIns="0" tIns="0" bIns="0">
+            <a:spAutoFit/>
+          </a:bodyPr>
+          <a:lstStyle/>
+          <a:p>
+            <a:r>
+              <a:rPr b="1" sz="2200">
+                <a:solidFill>
+                  <a:srgbClr val="1F3A7A"/>
+                </a:solidFill>
+                <a:latin typeface="メイリオ"/>
+                <a:ea typeface="メイリオ"/>
+              </a:rPr>
+              <a:t>■ 運用上の依存・恒久ルール</a:t>
+            </a:r>
+          </a:p>
+        </p:txBody>
+      </p:sp>
+      <p:sp>
+        <p:nvSpPr>
+          <p:cNvPr id="14" name="TextBox 13"/>
+          <p:cNvSpPr txBox="1"/>
+          <p:nvPr/>
+        </p:nvSpPr>
+        <p:spPr>
+          <a:xfrm>
+            <a:off x="3703320" y="4434840"/>
+            <a:ext cx="8031175" cy="1691639"/>
+          </a:xfrm>
+          <a:prstGeom prst="rect">
+            <a:avLst/>
+          </a:prstGeom>
+          <a:noFill/>
+        </p:spPr>
+        <p:txBody>
+          <a:bodyPr wrap="square" lIns="0" rIns="0" tIns="0" bIns="0">
+            <a:spAutoFit/>
+          </a:bodyPr>
+          <a:lstStyle/>
+          <a:p>
+            <a:pPr marL="228600" indent="-228600">
+              <a:buClr>
+                <a:srgbClr val="222222"/>
+              </a:buClr>
+              <a:lnSpc>
+                <a:spcPct val="140000"/>
+              </a:lnSpc>
+              <a:buFont typeface="Arial"/>
+              <a:buChar char="●"/>
+            </a:pPr>
+            <a:r>
+              <a:rPr b="0" sz="1800">
+                <a:solidFill>
+                  <a:srgbClr val="222222"/>
+                </a:solidFill>
+                <a:latin typeface="メイリオ"/>
+                <a:ea typeface="メイリオ"/>
+              </a:rPr>
+              <a:t>Max サブスクの 5h 枠を朝 6 時に消費（日中の作業と時間帯競合させない）</a:t>
+            </a:r>
+          </a:p>
+          <a:p>
+            <a:pPr marL="228600" indent="-228600">
+              <a:buClr>
+                <a:srgbClr val="222222"/>
+              </a:buClr>
+              <a:lnSpc>
+                <a:spcPct val="140000"/>
+              </a:lnSpc>
+              <a:buFont typeface="Arial"/>
+              <a:buChar char="●"/>
+            </a:pPr>
+            <a:r>
+              <a:rPr b="0" sz="1800">
+                <a:solidFill>
+                  <a:srgbClr val="222222"/>
+                </a:solidFill>
+                <a:latin typeface="メイリオ"/>
+                <a:ea typeface="メイリオ"/>
+              </a:rPr>
+              <a:t>PC オン時に Runner が動く前提（土日 PC オフだとその日はスキップされる）</a:t>
+            </a:r>
+          </a:p>
+          <a:p>
+            <a:pPr marL="228600" indent="-228600">
+              <a:buClr>
+                <a:srgbClr val="222222"/>
+              </a:buClr>
+              <a:lnSpc>
+                <a:spcPct val="140000"/>
+              </a:lnSpc>
+              <a:buFont typeface="Arial"/>
+              <a:buChar char="●"/>
+            </a:pPr>
+            <a:r>
+              <a:rPr b="0" sz="1800">
+                <a:solidFill>
+                  <a:srgbClr val="222222"/>
+                </a:solidFill>
+                <a:latin typeface="メイリオ"/>
+                <a:ea typeface="メイリオ"/>
+              </a:rPr>
+              <a:t>Windows .bat は CRLF 必須・ASCII のみ・goto 構造（feedback memory に恒久ルール記録済み）</a:t>
+            </a:r>
+          </a:p>
+          <a:p>
+            <a:pPr marL="228600" indent="-228600">
+              <a:buClr>
+                <a:srgbClr val="222222"/>
+              </a:buClr>
+              <a:lnSpc>
+                <a:spcPct val="140000"/>
+              </a:lnSpc>
+              <a:buFont typeface="Arial"/>
+              <a:buChar char="●"/>
+            </a:pPr>
+            <a:r>
+              <a:rPr b="0" sz="1800">
+                <a:solidFill>
+                  <a:srgbClr val="222222"/>
+                </a:solidFill>
+                <a:latin typeface="メイリオ"/>
+                <a:ea typeface="メイリオ"/>
+              </a:rPr>
+              <a:t>メール HTML 内画像は base64 inline 必須（private repo の raw URL は受信側からアクセス不可）</a:t>
+            </a:r>
+          </a:p>
+        </p:txBody>
+      </p:sp>
+    </p:spTree>
+  </p:cSld>
+  <p:clrMapOvr>
+    <a:masterClrMapping/>
+  </p:clrMapOvr>
+</p:sld>
+</file>
+
+<file path=ppt/slides/slide12.xml><?xml version="1.0" encoding="utf-8"?>
+<p:sld xmlns:a="http://schemas.openxmlformats.org/drawingml/2006/main" xmlns:p="http://schemas.openxmlformats.org/presentationml/2006/main" xmlns:r="http://schemas.openxmlformats.org/officeDocument/2006/relationships">
+  <p:cSld>
+    <p:spTree>
+      <p:nvGrpSpPr>
+        <p:cNvPr id="1" name=""/>
+        <p:cNvGrpSpPr/>
+        <p:nvPr/>
+      </p:nvGrpSpPr>
+      <p:grpSpPr/>
+      <p:sp>
+        <p:nvSpPr>
           <p:cNvPr id="2" name="TextBox 1"/>
           <p:cNvSpPr txBox="1"/>
           <p:nvPr/>
@@ -4336,7 +5065,7 @@
         <p:spPr>
           <a:xfrm>
             <a:off x="1828800" y="1371600"/>
-            <a:ext cx="718457" cy="718457"/>
+            <a:ext cx="628650" cy="628650"/>
           </a:xfrm>
           <a:prstGeom prst="ellipse">
             <a:avLst/>
@@ -4389,7 +5118,7 @@
         <p:spPr>
           <a:xfrm>
             <a:off x="2926080" y="1463040"/>
-            <a:ext cx="7894015" cy="718457"/>
+            <a:ext cx="7894015" cy="628650"/>
           </a:xfrm>
           <a:prstGeom prst="rect">
             <a:avLst/>
@@ -4423,8 +5152,8 @@
         </p:nvSpPr>
         <p:spPr>
           <a:xfrm>
-            <a:off x="1828800" y="2227217"/>
-            <a:ext cx="718457" cy="718457"/>
+            <a:off x="1828800" y="2137410"/>
+            <a:ext cx="628650" cy="628650"/>
           </a:xfrm>
           <a:prstGeom prst="ellipse">
             <a:avLst/>
@@ -4476,8 +5205,8 @@
         </p:nvSpPr>
         <p:spPr>
           <a:xfrm>
-            <a:off x="2926080" y="2318657"/>
-            <a:ext cx="7894015" cy="718457"/>
+            <a:off x="2926080" y="2228850"/>
+            <a:ext cx="7894015" cy="628650"/>
           </a:xfrm>
           <a:prstGeom prst="rect">
             <a:avLst/>
@@ -4511,8 +5240,8 @@
         </p:nvSpPr>
         <p:spPr>
           <a:xfrm>
-            <a:off x="1828800" y="3082834"/>
-            <a:ext cx="718457" cy="718457"/>
+            <a:off x="1828800" y="2903220"/>
+            <a:ext cx="628650" cy="628650"/>
           </a:xfrm>
           <a:prstGeom prst="ellipse">
             <a:avLst/>
@@ -4564,8 +5293,8 @@
         </p:nvSpPr>
         <p:spPr>
           <a:xfrm>
-            <a:off x="2926080" y="3174274"/>
-            <a:ext cx="7894015" cy="718457"/>
+            <a:off x="2926080" y="2994660"/>
+            <a:ext cx="7894015" cy="628650"/>
           </a:xfrm>
           <a:prstGeom prst="rect">
             <a:avLst/>
@@ -4599,8 +5328,8 @@
         </p:nvSpPr>
         <p:spPr>
           <a:xfrm>
-            <a:off x="1828800" y="3938451"/>
-            <a:ext cx="718457" cy="718457"/>
+            <a:off x="1828800" y="3669030"/>
+            <a:ext cx="628650" cy="628650"/>
           </a:xfrm>
           <a:prstGeom prst="ellipse">
             <a:avLst/>
@@ -4652,8 +5381,8 @@
         </p:nvSpPr>
         <p:spPr>
           <a:xfrm>
-            <a:off x="2926080" y="4029891"/>
-            <a:ext cx="7894015" cy="718457"/>
+            <a:off x="2926080" y="3760470"/>
+            <a:ext cx="7894015" cy="628650"/>
           </a:xfrm>
           <a:prstGeom prst="rect">
             <a:avLst/>
@@ -4674,7 +5403,7 @@
                 <a:latin typeface="メイリオ"/>
                 <a:ea typeface="メイリオ"/>
               </a:rPr>
-              <a:t>曜日マトリクス &amp; サムネ運用</a:t>
+              <a:t>Obsidian タグ仕様（階層タグ + entity）</a:t>
             </a:r>
           </a:p>
         </p:txBody>
@@ -4687,8 +5416,8 @@
         </p:nvSpPr>
         <p:spPr>
           <a:xfrm>
-            <a:off x="1828800" y="4794068"/>
-            <a:ext cx="718457" cy="718457"/>
+            <a:off x="1828800" y="4434840"/>
+            <a:ext cx="628650" cy="628650"/>
           </a:xfrm>
           <a:prstGeom prst="ellipse">
             <a:avLst/>
@@ -4740,8 +5469,8 @@
         </p:nvSpPr>
         <p:spPr>
           <a:xfrm>
-            <a:off x="2926080" y="4885508"/>
-            <a:ext cx="7894015" cy="718457"/>
+            <a:off x="2926080" y="4526279"/>
+            <a:ext cx="7894015" cy="628650"/>
           </a:xfrm>
           <a:prstGeom prst="rect">
             <a:avLst/>
@@ -4762,7 +5491,7 @@
                 <a:latin typeface="メイリオ"/>
                 <a:ea typeface="メイリオ"/>
               </a:rPr>
-              <a:t>採用方針の変遷（② → D 案）</a:t>
+              <a:t>曜日マトリクス &amp; サムネ運用</a:t>
             </a:r>
           </a:p>
         </p:txBody>
@@ -4775,8 +5504,8 @@
         </p:nvSpPr>
         <p:spPr>
           <a:xfrm>
-            <a:off x="1828800" y="5649685"/>
-            <a:ext cx="718457" cy="718457"/>
+            <a:off x="1828800" y="5200650"/>
+            <a:ext cx="628650" cy="628650"/>
           </a:xfrm>
           <a:prstGeom prst="ellipse">
             <a:avLst/>
@@ -4828,8 +5557,8 @@
         </p:nvSpPr>
         <p:spPr>
           <a:xfrm>
-            <a:off x="2926080" y="5741125"/>
-            <a:ext cx="7894015" cy="718457"/>
+            <a:off x="2926080" y="5292090"/>
+            <a:ext cx="7894015" cy="628650"/>
           </a:xfrm>
           <a:prstGeom prst="rect">
             <a:avLst/>
@@ -4850,7 +5579,7 @@
                 <a:latin typeface="メイリオ"/>
                 <a:ea typeface="メイリオ"/>
               </a:rPr>
-              <a:t>コスト・運用・テスト機構</a:t>
+              <a:t>採用方針の変遷（② → D 案）</a:t>
             </a:r>
           </a:p>
         </p:txBody>
@@ -4863,8 +5592,8 @@
         </p:nvSpPr>
         <p:spPr>
           <a:xfrm>
-            <a:off x="1828800" y="6505302"/>
-            <a:ext cx="718457" cy="718457"/>
+            <a:off x="1828800" y="5966460"/>
+            <a:ext cx="628650" cy="628650"/>
           </a:xfrm>
           <a:prstGeom prst="ellipse">
             <a:avLst/>
@@ -4916,8 +5645,96 @@
         </p:nvSpPr>
         <p:spPr>
           <a:xfrm>
-            <a:off x="2926080" y="6596742"/>
-            <a:ext cx="7894015" cy="718457"/>
+            <a:off x="2926080" y="6057900"/>
+            <a:ext cx="7894015" cy="628650"/>
+          </a:xfrm>
+          <a:prstGeom prst="rect">
+            <a:avLst/>
+          </a:prstGeom>
+          <a:noFill/>
+        </p:spPr>
+        <p:txBody>
+          <a:bodyPr wrap="square" lIns="0" rIns="0" tIns="0" bIns="0" anchor="ctr">
+            <a:spAutoFit/>
+          </a:bodyPr>
+          <a:lstStyle/>
+          <a:p>
+            <a:r>
+              <a:rPr b="1" sz="2400">
+                <a:solidFill>
+                  <a:srgbClr val="222222"/>
+                </a:solidFill>
+                <a:latin typeface="メイリオ"/>
+                <a:ea typeface="メイリオ"/>
+              </a:rPr>
+              <a:t>コスト・運用・テスト機構</a:t>
+            </a:r>
+          </a:p>
+        </p:txBody>
+      </p:sp>
+      <p:sp>
+        <p:nvSpPr>
+          <p:cNvPr id="19" name="Oval 18"/>
+          <p:cNvSpPr/>
+          <p:nvPr/>
+        </p:nvSpPr>
+        <p:spPr>
+          <a:xfrm>
+            <a:off x="1828800" y="6732270"/>
+            <a:ext cx="628650" cy="628650"/>
+          </a:xfrm>
+          <a:prstGeom prst="ellipse">
+            <a:avLst/>
+          </a:prstGeom>
+          <a:solidFill>
+            <a:srgbClr val="1F3A7A"/>
+          </a:solidFill>
+          <a:ln>
+            <a:noFill/>
+          </a:ln>
+        </p:spPr>
+        <p:style>
+          <a:lnRef idx="1">
+            <a:schemeClr val="accent1"/>
+          </a:lnRef>
+          <a:fillRef idx="3">
+            <a:schemeClr val="accent1"/>
+          </a:fillRef>
+          <a:effectRef idx="2">
+            <a:schemeClr val="accent1"/>
+          </a:effectRef>
+          <a:fontRef idx="minor">
+            <a:schemeClr val="lt1"/>
+          </a:fontRef>
+        </p:style>
+        <p:txBody>
+          <a:bodyPr rtlCol="0" anchor="ctr" lIns="0" rIns="0" tIns="0" bIns="0"/>
+          <a:lstStyle/>
+          <a:p>
+            <a:pPr algn="ctr"/>
+            <a:r>
+              <a:rPr b="1" sz="2600">
+                <a:solidFill>
+                  <a:srgbClr val="FFFFFF"/>
+                </a:solidFill>
+                <a:latin typeface="メイリオ"/>
+                <a:ea typeface="メイリオ"/>
+              </a:rPr>
+              <a:t>8</a:t>
+            </a:r>
+          </a:p>
+        </p:txBody>
+      </p:sp>
+      <p:sp>
+        <p:nvSpPr>
+          <p:cNvPr id="20" name="TextBox 19"/>
+          <p:cNvSpPr txBox="1"/>
+          <p:nvPr/>
+        </p:nvSpPr>
+        <p:spPr>
+          <a:xfrm>
+            <a:off x="2926080" y="6823709"/>
+            <a:ext cx="7894015" cy="628650"/>
           </a:xfrm>
           <a:prstGeom prst="rect">
             <a:avLst/>
@@ -9145,6 +9962,1478 @@
 </file>
 
 <file path=ppt/slides/slide6.xml><?xml version="1.0" encoding="utf-8"?>
+<p:sld xmlns:a="http://schemas.openxmlformats.org/drawingml/2006/main" xmlns:p="http://schemas.openxmlformats.org/presentationml/2006/main" xmlns:r="http://schemas.openxmlformats.org/officeDocument/2006/relationships">
+  <p:cSld>
+    <p:spTree>
+      <p:nvGrpSpPr>
+        <p:cNvPr id="1" name=""/>
+        <p:cNvGrpSpPr/>
+        <p:nvPr/>
+      </p:nvGrpSpPr>
+      <p:grpSpPr/>
+      <p:sp>
+        <p:nvSpPr>
+          <p:cNvPr id="2" name="Rectangle 1"/>
+          <p:cNvSpPr/>
+          <p:nvPr/>
+        </p:nvSpPr>
+        <p:spPr>
+          <a:xfrm>
+            <a:off x="457200" y="365760"/>
+            <a:ext cx="45720" cy="548640"/>
+          </a:xfrm>
+          <a:prstGeom prst="rect">
+            <a:avLst/>
+          </a:prstGeom>
+          <a:solidFill>
+            <a:srgbClr val="1F3A7A"/>
+          </a:solidFill>
+          <a:ln>
+            <a:noFill/>
+          </a:ln>
+        </p:spPr>
+        <p:style>
+          <a:lnRef idx="1">
+            <a:schemeClr val="accent1"/>
+          </a:lnRef>
+          <a:fillRef idx="3">
+            <a:schemeClr val="accent1"/>
+          </a:fillRef>
+          <a:effectRef idx="2">
+            <a:schemeClr val="accent1"/>
+          </a:effectRef>
+          <a:fontRef idx="minor">
+            <a:schemeClr val="lt1"/>
+          </a:fontRef>
+        </p:style>
+        <p:txBody>
+          <a:bodyPr rtlCol="0" anchor="ctr"/>
+          <a:lstStyle/>
+          <a:p>
+            <a:pPr algn="ctr"/>
+          </a:p>
+        </p:txBody>
+      </p:sp>
+      <p:sp>
+        <p:nvSpPr>
+          <p:cNvPr id="3" name="TextBox 2"/>
+          <p:cNvSpPr txBox="1"/>
+          <p:nvPr/>
+        </p:nvSpPr>
+        <p:spPr>
+          <a:xfrm>
+            <a:off x="621792" y="338328"/>
+            <a:ext cx="11094415" cy="228600"/>
+          </a:xfrm>
+          <a:prstGeom prst="rect">
+            <a:avLst/>
+          </a:prstGeom>
+          <a:noFill/>
+        </p:spPr>
+        <p:txBody>
+          <a:bodyPr wrap="square" lIns="0" rIns="0" tIns="0" bIns="0">
+            <a:spAutoFit/>
+          </a:bodyPr>
+          <a:lstStyle/>
+          <a:p>
+            <a:r>
+              <a:rPr b="1" sz="1700">
+                <a:solidFill>
+                  <a:srgbClr val="1F3A7A"/>
+                </a:solidFill>
+                <a:latin typeface="メイリオ"/>
+                <a:ea typeface="メイリオ"/>
+              </a:rPr>
+              <a:t>タグ仕様</a:t>
+            </a:r>
+          </a:p>
+        </p:txBody>
+      </p:sp>
+      <p:sp>
+        <p:nvSpPr>
+          <p:cNvPr id="4" name="TextBox 3"/>
+          <p:cNvSpPr txBox="1"/>
+          <p:nvPr/>
+        </p:nvSpPr>
+        <p:spPr>
+          <a:xfrm>
+            <a:off x="621792" y="548640"/>
+            <a:ext cx="11094415" cy="457200"/>
+          </a:xfrm>
+          <a:prstGeom prst="rect">
+            <a:avLst/>
+          </a:prstGeom>
+          <a:noFill/>
+        </p:spPr>
+        <p:txBody>
+          <a:bodyPr wrap="square" lIns="0" rIns="0" tIns="0" bIns="0">
+            <a:spAutoFit/>
+          </a:bodyPr>
+          <a:lstStyle/>
+          <a:p>
+            <a:pPr>
+              <a:lnSpc>
+                <a:spcPct val="105000"/>
+              </a:lnSpc>
+            </a:pPr>
+            <a:r>
+              <a:rPr b="1" sz="3000">
+                <a:solidFill>
+                  <a:srgbClr val="1F3A7A"/>
+                </a:solidFill>
+                <a:latin typeface="メイリオ"/>
+                <a:ea typeface="メイリオ"/>
+              </a:rPr>
+              <a:t>Obsidian 階層タグ — 5 entity + 4 補助 + score</a:t>
+            </a:r>
+          </a:p>
+        </p:txBody>
+      </p:sp>
+      <p:graphicFrame>
+        <p:nvGraphicFramePr>
+          <p:cNvPr id="5" name="Table 4"/>
+          <p:cNvGraphicFramePr>
+            <a:graphicFrameLocks noGrp="1"/>
+          </p:cNvGraphicFramePr>
+          <p:nvPr/>
+        </p:nvGraphicFramePr>
+        <p:xfrm>
+          <a:off x="457200" y="1280160"/>
+          <a:ext cx="11277292" cy="3840479"/>
+        </p:xfrm>
+        <a:graphic>
+          <a:graphicData uri="http://schemas.openxmlformats.org/drawingml/2006/table">
+            <a:tbl>
+              <a:tblPr firstRow="1" bandRow="1">
+                <a:tableStyleId>{5C22544A-7EE6-4342-B048-85BDC9FD1C3A}</a:tableStyleId>
+              </a:tblPr>
+              <a:tblGrid>
+                <a:gridCol w="3608734"/>
+                <a:gridCol w="2556186"/>
+                <a:gridCol w="2556186"/>
+                <a:gridCol w="2556186"/>
+              </a:tblGrid>
+              <a:tr h="320039">
+                <a:tc>
+                  <a:txBody>
+                    <a:bodyPr/>
+                    <a:lstStyle/>
+                    <a:p>
+                      <a:pPr algn="l"/>
+                      <a:r>
+                        <a:rPr b="1" sz="1600">
+                          <a:solidFill>
+                            <a:srgbClr val="FFFFFF"/>
+                          </a:solidFill>
+                          <a:latin typeface="メイリオ"/>
+                          <a:ea typeface="メイリオ"/>
+                        </a:rPr>
+                        <a:t>プレフィクス</a:t>
+                      </a:r>
+                    </a:p>
+                  </a:txBody>
+                  <a:tcPr>
+                    <a:solidFill>
+                      <a:srgbClr val="1F3A7A"/>
+                    </a:solidFill>
+                  </a:tcPr>
+                </a:tc>
+                <a:tc>
+                  <a:txBody>
+                    <a:bodyPr/>
+                    <a:lstStyle/>
+                    <a:p>
+                      <a:pPr algn="r"/>
+                      <a:r>
+                        <a:rPr b="1" sz="1600">
+                          <a:solidFill>
+                            <a:srgbClr val="FFFFFF"/>
+                          </a:solidFill>
+                          <a:latin typeface="メイリオ"/>
+                          <a:ea typeface="メイリオ"/>
+                        </a:rPr>
+                        <a:t>種別</a:t>
+                      </a:r>
+                    </a:p>
+                  </a:txBody>
+                  <a:tcPr>
+                    <a:solidFill>
+                      <a:srgbClr val="1F3A7A"/>
+                    </a:solidFill>
+                  </a:tcPr>
+                </a:tc>
+                <a:tc>
+                  <a:txBody>
+                    <a:bodyPr/>
+                    <a:lstStyle/>
+                    <a:p>
+                      <a:pPr algn="r"/>
+                      <a:r>
+                        <a:rPr b="1" sz="1600">
+                          <a:solidFill>
+                            <a:srgbClr val="FFFFFF"/>
+                          </a:solidFill>
+                          <a:latin typeface="メイリオ"/>
+                          <a:ea typeface="メイリオ"/>
+                        </a:rPr>
+                        <a:t>値の規則</a:t>
+                      </a:r>
+                    </a:p>
+                  </a:txBody>
+                  <a:tcPr>
+                    <a:solidFill>
+                      <a:srgbClr val="1F3A7A"/>
+                    </a:solidFill>
+                  </a:tcPr>
+                </a:tc>
+                <a:tc>
+                  <a:txBody>
+                    <a:bodyPr/>
+                    <a:lstStyle/>
+                    <a:p>
+                      <a:pPr algn="r"/>
+                      <a:r>
+                        <a:rPr b="1" sz="1600">
+                          <a:solidFill>
+                            <a:srgbClr val="FFFFFF"/>
+                          </a:solidFill>
+                          <a:latin typeface="メイリオ"/>
+                          <a:ea typeface="メイリオ"/>
+                        </a:rPr>
+                        <a:t>例</a:t>
+                      </a:r>
+                    </a:p>
+                  </a:txBody>
+                  <a:tcPr>
+                    <a:solidFill>
+                      <a:srgbClr val="1F3A7A"/>
+                    </a:solidFill>
+                  </a:tcPr>
+                </a:tc>
+              </a:tr>
+              <a:tr h="320039">
+                <a:tc>
+                  <a:txBody>
+                    <a:bodyPr/>
+                    <a:lstStyle/>
+                    <a:p>
+                      <a:pPr algn="l"/>
+                      <a:r>
+                        <a:rPr b="1" sz="1500">
+                          <a:solidFill>
+                            <a:srgbClr val="222222"/>
+                          </a:solidFill>
+                          <a:latin typeface="メイリオ"/>
+                          <a:ea typeface="メイリオ"/>
+                        </a:rPr>
+                        <a:t>（なし）</a:t>
+                      </a:r>
+                    </a:p>
+                  </a:txBody>
+                  <a:tcPr>
+                    <a:solidFill>
+                      <a:srgbClr val="FFFFFF"/>
+                    </a:solidFill>
+                  </a:tcPr>
+                </a:tc>
+                <a:tc>
+                  <a:txBody>
+                    <a:bodyPr/>
+                    <a:lstStyle/>
+                    <a:p>
+                      <a:pPr algn="r"/>
+                      <a:r>
+                        <a:rPr b="0" sz="1500">
+                          <a:solidFill>
+                            <a:srgbClr val="222222"/>
+                          </a:solidFill>
+                          <a:latin typeface="メイリオ"/>
+                          <a:ea typeface="メイリオ"/>
+                        </a:rPr>
+                        <a:t>共通固定 4 件</a:t>
+                      </a:r>
+                    </a:p>
+                  </a:txBody>
+                  <a:tcPr>
+                    <a:solidFill>
+                      <a:srgbClr val="FFFFFF"/>
+                    </a:solidFill>
+                  </a:tcPr>
+                </a:tc>
+                <a:tc>
+                  <a:txBody>
+                    <a:bodyPr/>
+                    <a:lstStyle/>
+                    <a:p>
+                      <a:pPr algn="r"/>
+                      <a:r>
+                        <a:rPr b="0" sz="1500">
+                          <a:solidFill>
+                            <a:srgbClr val="222222"/>
+                          </a:solidFill>
+                          <a:latin typeface="メイリオ"/>
+                          <a:ea typeface="メイリオ"/>
+                        </a:rPr>
+                        <a:t>英字、号番号入り</a:t>
+                      </a:r>
+                    </a:p>
+                  </a:txBody>
+                  <a:tcPr>
+                    <a:solidFill>
+                      <a:srgbClr val="FFFFFF"/>
+                    </a:solidFill>
+                  </a:tcPr>
+                </a:tc>
+                <a:tc>
+                  <a:txBody>
+                    <a:bodyPr/>
+                    <a:lstStyle/>
+                    <a:p>
+                      <a:pPr algn="r"/>
+                      <a:r>
+                        <a:rPr b="0" sz="1500">
+                          <a:solidFill>
+                            <a:srgbClr val="222222"/>
+                          </a:solidFill>
+                          <a:latin typeface="メイリオ"/>
+                          <a:ea typeface="メイリオ"/>
+                        </a:rPr>
+                        <a:t>daily / newsletter / news-grasp / issue-{号}</a:t>
+                      </a:r>
+                    </a:p>
+                  </a:txBody>
+                  <a:tcPr>
+                    <a:solidFill>
+                      <a:srgbClr val="FFFFFF"/>
+                    </a:solidFill>
+                  </a:tcPr>
+                </a:tc>
+              </a:tr>
+              <a:tr h="320039">
+                <a:tc>
+                  <a:txBody>
+                    <a:bodyPr/>
+                    <a:lstStyle/>
+                    <a:p>
+                      <a:pPr algn="l"/>
+                      <a:r>
+                        <a:rPr b="1" sz="1500">
+                          <a:solidFill>
+                            <a:srgbClr val="222222"/>
+                          </a:solidFill>
+                          <a:latin typeface="メイリオ"/>
+                          <a:ea typeface="メイリオ"/>
+                        </a:rPr>
+                        <a:t>cat/</a:t>
+                      </a:r>
+                    </a:p>
+                  </a:txBody>
+                  <a:tcPr>
+                    <a:solidFill>
+                      <a:srgbClr val="D9E7F5"/>
+                    </a:solidFill>
+                  </a:tcPr>
+                </a:tc>
+                <a:tc>
+                  <a:txBody>
+                    <a:bodyPr/>
+                    <a:lstStyle/>
+                    <a:p>
+                      <a:pPr algn="r"/>
+                      <a:r>
+                        <a:rPr b="0" sz="1500">
+                          <a:solidFill>
+                            <a:srgbClr val="222222"/>
+                          </a:solidFill>
+                          <a:latin typeface="メイリオ"/>
+                          <a:ea typeface="メイリオ"/>
+                        </a:rPr>
+                        <a:t>カテゴリ id</a:t>
+                      </a:r>
+                    </a:p>
+                  </a:txBody>
+                  <a:tcPr>
+                    <a:solidFill>
+                      <a:srgbClr val="D9E7F5"/>
+                    </a:solidFill>
+                  </a:tcPr>
+                </a:tc>
+                <a:tc>
+                  <a:txBody>
+                    <a:bodyPr/>
+                    <a:lstStyle/>
+                    <a:p>
+                      <a:pPr algn="r"/>
+                      <a:r>
+                        <a:rPr b="0" sz="1500">
+                          <a:solidFill>
+                            <a:srgbClr val="222222"/>
+                          </a:solidFill>
+                          <a:latin typeface="メイリオ"/>
+                          <a:ea typeface="メイリオ"/>
+                        </a:rPr>
+                        <a:t>5 種固定</a:t>
+                      </a:r>
+                    </a:p>
+                  </a:txBody>
+                  <a:tcPr>
+                    <a:solidFill>
+                      <a:srgbClr val="D9E7F5"/>
+                    </a:solidFill>
+                  </a:tcPr>
+                </a:tc>
+                <a:tc>
+                  <a:txBody>
+                    <a:bodyPr/>
+                    <a:lstStyle/>
+                    <a:p>
+                      <a:pPr algn="r"/>
+                      <a:r>
+                        <a:rPr b="0" sz="1500">
+                          <a:solidFill>
+                            <a:srgbClr val="222222"/>
+                          </a:solidFill>
+                          <a:latin typeface="メイリオ"/>
+                          <a:ea typeface="メイリオ"/>
+                        </a:rPr>
+                        <a:t>cat/fx / cat/ai / cat/it / cat/economy / cat/game</a:t>
+                      </a:r>
+                    </a:p>
+                  </a:txBody>
+                  <a:tcPr>
+                    <a:solidFill>
+                      <a:srgbClr val="D9E7F5"/>
+                    </a:solidFill>
+                  </a:tcPr>
+                </a:tc>
+              </a:tr>
+              <a:tr h="320039">
+                <a:tc>
+                  <a:txBody>
+                    <a:bodyPr/>
+                    <a:lstStyle/>
+                    <a:p>
+                      <a:pPr algn="l"/>
+                      <a:r>
+                        <a:rPr b="1" sz="1500">
+                          <a:solidFill>
+                            <a:srgbClr val="222222"/>
+                          </a:solidFill>
+                          <a:latin typeface="メイリオ"/>
+                          <a:ea typeface="メイリオ"/>
+                        </a:rPr>
+                        <a:t>co/</a:t>
+                      </a:r>
+                    </a:p>
+                  </a:txBody>
+                  <a:tcPr>
+                    <a:solidFill>
+                      <a:srgbClr val="FFFFFF"/>
+                    </a:solidFill>
+                  </a:tcPr>
+                </a:tc>
+                <a:tc>
+                  <a:txBody>
+                    <a:bodyPr/>
+                    <a:lstStyle/>
+                    <a:p>
+                      <a:pPr algn="r"/>
+                      <a:r>
+                        <a:rPr b="0" sz="1500">
+                          <a:solidFill>
+                            <a:srgbClr val="222222"/>
+                          </a:solidFill>
+                          <a:latin typeface="メイリオ"/>
+                          <a:ea typeface="メイリオ"/>
+                        </a:rPr>
+                        <a:t>企業／組織</a:t>
+                      </a:r>
+                    </a:p>
+                  </a:txBody>
+                  <a:tcPr>
+                    <a:solidFill>
+                      <a:srgbClr val="FFFFFF"/>
+                    </a:solidFill>
+                  </a:tcPr>
+                </a:tc>
+                <a:tc>
+                  <a:txBody>
+                    <a:bodyPr/>
+                    <a:lstStyle/>
+                    <a:p>
+                      <a:pPr algn="r"/>
+                      <a:r>
+                        <a:rPr b="0" sz="1500">
+                          <a:solidFill>
+                            <a:srgbClr val="222222"/>
+                          </a:solidFill>
+                          <a:latin typeface="メイリオ"/>
+                          <a:ea typeface="メイリオ"/>
+                        </a:rPr>
+                        <a:t>日本語優先（英字固有名詞は原文）</a:t>
+                      </a:r>
+                    </a:p>
+                  </a:txBody>
+                  <a:tcPr>
+                    <a:solidFill>
+                      <a:srgbClr val="FFFFFF"/>
+                    </a:solidFill>
+                  </a:tcPr>
+                </a:tc>
+                <a:tc>
+                  <a:txBody>
+                    <a:bodyPr/>
+                    <a:lstStyle/>
+                    <a:p>
+                      <a:pPr algn="r"/>
+                      <a:r>
+                        <a:rPr b="0" sz="1500">
+                          <a:solidFill>
+                            <a:srgbClr val="222222"/>
+                          </a:solidFill>
+                          <a:latin typeface="メイリオ"/>
+                          <a:ea typeface="メイリオ"/>
+                        </a:rPr>
+                        <a:t>co/トヨタ / co/NTTデータ / co/OpenAI / co/NVIDIA</a:t>
+                      </a:r>
+                    </a:p>
+                  </a:txBody>
+                  <a:tcPr>
+                    <a:solidFill>
+                      <a:srgbClr val="FFFFFF"/>
+                    </a:solidFill>
+                  </a:tcPr>
+                </a:tc>
+              </a:tr>
+              <a:tr h="320039">
+                <a:tc>
+                  <a:txBody>
+                    <a:bodyPr/>
+                    <a:lstStyle/>
+                    <a:p>
+                      <a:pPr algn="l"/>
+                      <a:r>
+                        <a:rPr b="1" sz="1500">
+                          <a:solidFill>
+                            <a:srgbClr val="222222"/>
+                          </a:solidFill>
+                          <a:latin typeface="メイリオ"/>
+                          <a:ea typeface="メイリオ"/>
+                        </a:rPr>
+                        <a:t>country/</a:t>
+                      </a:r>
+                    </a:p>
+                  </a:txBody>
+                  <a:tcPr>
+                    <a:solidFill>
+                      <a:srgbClr val="D9E7F5"/>
+                    </a:solidFill>
+                  </a:tcPr>
+                </a:tc>
+                <a:tc>
+                  <a:txBody>
+                    <a:bodyPr/>
+                    <a:lstStyle/>
+                    <a:p>
+                      <a:pPr algn="r"/>
+                      <a:r>
+                        <a:rPr b="0" sz="1500">
+                          <a:solidFill>
+                            <a:srgbClr val="222222"/>
+                          </a:solidFill>
+                          <a:latin typeface="メイリオ"/>
+                          <a:ea typeface="メイリオ"/>
+                        </a:rPr>
+                        <a:t>国</a:t>
+                      </a:r>
+                    </a:p>
+                  </a:txBody>
+                  <a:tcPr>
+                    <a:solidFill>
+                      <a:srgbClr val="D9E7F5"/>
+                    </a:solidFill>
+                  </a:tcPr>
+                </a:tc>
+                <a:tc>
+                  <a:txBody>
+                    <a:bodyPr/>
+                    <a:lstStyle/>
+                    <a:p>
+                      <a:pPr algn="r"/>
+                      <a:r>
+                        <a:rPr b="0" sz="1500">
+                          <a:solidFill>
+                            <a:srgbClr val="222222"/>
+                          </a:solidFill>
+                          <a:latin typeface="メイリオ"/>
+                          <a:ea typeface="メイリオ"/>
+                        </a:rPr>
+                        <a:t>日本語国名（EU は EU）</a:t>
+                      </a:r>
+                    </a:p>
+                  </a:txBody>
+                  <a:tcPr>
+                    <a:solidFill>
+                      <a:srgbClr val="D9E7F5"/>
+                    </a:solidFill>
+                  </a:tcPr>
+                </a:tc>
+                <a:tc>
+                  <a:txBody>
+                    <a:bodyPr/>
+                    <a:lstStyle/>
+                    <a:p>
+                      <a:pPr algn="r"/>
+                      <a:r>
+                        <a:rPr b="0" sz="1500">
+                          <a:solidFill>
+                            <a:srgbClr val="222222"/>
+                          </a:solidFill>
+                          <a:latin typeface="メイリオ"/>
+                          <a:ea typeface="メイリオ"/>
+                        </a:rPr>
+                        <a:t>country/日本 / country/米国 / country/EU</a:t>
+                      </a:r>
+                    </a:p>
+                  </a:txBody>
+                  <a:tcPr>
+                    <a:solidFill>
+                      <a:srgbClr val="D9E7F5"/>
+                    </a:solidFill>
+                  </a:tcPr>
+                </a:tc>
+              </a:tr>
+              <a:tr h="320039">
+                <a:tc>
+                  <a:txBody>
+                    <a:bodyPr/>
+                    <a:lstStyle/>
+                    <a:p>
+                      <a:pPr algn="l"/>
+                      <a:r>
+                        <a:rPr b="1" sz="1500">
+                          <a:solidFill>
+                            <a:srgbClr val="222222"/>
+                          </a:solidFill>
+                          <a:latin typeface="メイリオ"/>
+                          <a:ea typeface="メイリオ"/>
+                        </a:rPr>
+                        <a:t>svc/</a:t>
+                      </a:r>
+                    </a:p>
+                  </a:txBody>
+                  <a:tcPr>
+                    <a:solidFill>
+                      <a:srgbClr val="FFFFFF"/>
+                    </a:solidFill>
+                  </a:tcPr>
+                </a:tc>
+                <a:tc>
+                  <a:txBody>
+                    <a:bodyPr/>
+                    <a:lstStyle/>
+                    <a:p>
+                      <a:pPr algn="r"/>
+                      <a:r>
+                        <a:rPr b="0" sz="1500">
+                          <a:solidFill>
+                            <a:srgbClr val="222222"/>
+                          </a:solidFill>
+                          <a:latin typeface="メイリオ"/>
+                          <a:ea typeface="メイリオ"/>
+                        </a:rPr>
+                        <a:t>サービス／製品</a:t>
+                      </a:r>
+                    </a:p>
+                  </a:txBody>
+                  <a:tcPr>
+                    <a:solidFill>
+                      <a:srgbClr val="FFFFFF"/>
+                    </a:solidFill>
+                  </a:tcPr>
+                </a:tc>
+                <a:tc>
+                  <a:txBody>
+                    <a:bodyPr/>
+                    <a:lstStyle/>
+                    <a:p>
+                      <a:pPr algn="r"/>
+                      <a:r>
+                        <a:rPr b="0" sz="1500">
+                          <a:solidFill>
+                            <a:srgbClr val="222222"/>
+                          </a:solidFill>
+                          <a:latin typeface="メイリオ"/>
+                          <a:ea typeface="メイリオ"/>
+                        </a:rPr>
+                        <a:t>原文。スペース→ハイフン、ピリオド→アンダースコア</a:t>
+                      </a:r>
+                    </a:p>
+                  </a:txBody>
+                  <a:tcPr>
+                    <a:solidFill>
+                      <a:srgbClr val="FFFFFF"/>
+                    </a:solidFill>
+                  </a:tcPr>
+                </a:tc>
+                <a:tc>
+                  <a:txBody>
+                    <a:bodyPr/>
+                    <a:lstStyle/>
+                    <a:p>
+                      <a:pPr algn="r"/>
+                      <a:r>
+                        <a:rPr b="0" sz="1500">
+                          <a:solidFill>
+                            <a:srgbClr val="222222"/>
+                          </a:solidFill>
+                          <a:latin typeface="メイリオ"/>
+                          <a:ea typeface="メイリオ"/>
+                        </a:rPr>
+                        <a:t>svc/Claude / svc/Switch-2 / svc/GPT-5_5</a:t>
+                      </a:r>
+                    </a:p>
+                  </a:txBody>
+                  <a:tcPr>
+                    <a:solidFill>
+                      <a:srgbClr val="FFFFFF"/>
+                    </a:solidFill>
+                  </a:tcPr>
+                </a:tc>
+              </a:tr>
+              <a:tr h="320039">
+                <a:tc>
+                  <a:txBody>
+                    <a:bodyPr/>
+                    <a:lstStyle/>
+                    <a:p>
+                      <a:pPr algn="l"/>
+                      <a:r>
+                        <a:rPr b="1" sz="1500">
+                          <a:solidFill>
+                            <a:srgbClr val="222222"/>
+                          </a:solidFill>
+                          <a:latin typeface="メイリオ"/>
+                          <a:ea typeface="メイリオ"/>
+                        </a:rPr>
+                        <a:t>person/</a:t>
+                      </a:r>
+                    </a:p>
+                  </a:txBody>
+                  <a:tcPr>
+                    <a:solidFill>
+                      <a:srgbClr val="D9E7F5"/>
+                    </a:solidFill>
+                  </a:tcPr>
+                </a:tc>
+                <a:tc>
+                  <a:txBody>
+                    <a:bodyPr/>
+                    <a:lstStyle/>
+                    <a:p>
+                      <a:pPr algn="r"/>
+                      <a:r>
+                        <a:rPr b="0" sz="1500">
+                          <a:solidFill>
+                            <a:srgbClr val="222222"/>
+                          </a:solidFill>
+                          <a:latin typeface="メイリオ"/>
+                          <a:ea typeface="メイリオ"/>
+                        </a:rPr>
+                        <a:t>人名</a:t>
+                      </a:r>
+                    </a:p>
+                  </a:txBody>
+                  <a:tcPr>
+                    <a:solidFill>
+                      <a:srgbClr val="D9E7F5"/>
+                    </a:solidFill>
+                  </a:tcPr>
+                </a:tc>
+                <a:tc>
+                  <a:txBody>
+                    <a:bodyPr/>
+                    <a:lstStyle/>
+                    <a:p>
+                      <a:pPr algn="r"/>
+                      <a:r>
+                        <a:rPr b="0" sz="1500">
+                          <a:solidFill>
+                            <a:srgbClr val="222222"/>
+                          </a:solidFill>
+                          <a:latin typeface="メイリオ"/>
+                          <a:ea typeface="メイリオ"/>
+                        </a:rPr>
+                        <a:t>日本語フルネーム、中点 ・ OK</a:t>
+                      </a:r>
+                    </a:p>
+                  </a:txBody>
+                  <a:tcPr>
+                    <a:solidFill>
+                      <a:srgbClr val="D9E7F5"/>
+                    </a:solidFill>
+                  </a:tcPr>
+                </a:tc>
+                <a:tc>
+                  <a:txBody>
+                    <a:bodyPr/>
+                    <a:lstStyle/>
+                    <a:p>
+                      <a:pPr algn="r"/>
+                      <a:r>
+                        <a:rPr b="0" sz="1500">
+                          <a:solidFill>
+                            <a:srgbClr val="222222"/>
+                          </a:solidFill>
+                          <a:latin typeface="メイリオ"/>
+                          <a:ea typeface="メイリオ"/>
+                        </a:rPr>
+                        <a:t>person/植田和男 / person/ジェローム・パウエル</a:t>
+                      </a:r>
+                    </a:p>
+                  </a:txBody>
+                  <a:tcPr>
+                    <a:solidFill>
+                      <a:srgbClr val="D9E7F5"/>
+                    </a:solidFill>
+                  </a:tcPr>
+                </a:tc>
+              </a:tr>
+              <a:tr h="320039">
+                <a:tc>
+                  <a:txBody>
+                    <a:bodyPr/>
+                    <a:lstStyle/>
+                    <a:p>
+                      <a:pPr algn="l"/>
+                      <a:r>
+                        <a:rPr b="1" sz="1500">
+                          <a:solidFill>
+                            <a:srgbClr val="222222"/>
+                          </a:solidFill>
+                          <a:latin typeface="メイリオ"/>
+                          <a:ea typeface="メイリオ"/>
+                        </a:rPr>
+                        <a:t>ticker/</a:t>
+                      </a:r>
+                    </a:p>
+                  </a:txBody>
+                  <a:tcPr>
+                    <a:solidFill>
+                      <a:srgbClr val="FFFFFF"/>
+                    </a:solidFill>
+                  </a:tcPr>
+                </a:tc>
+                <a:tc>
+                  <a:txBody>
+                    <a:bodyPr/>
+                    <a:lstStyle/>
+                    <a:p>
+                      <a:pPr algn="r"/>
+                      <a:r>
+                        <a:rPr b="0" sz="1500">
+                          <a:solidFill>
+                            <a:srgbClr val="222222"/>
+                          </a:solidFill>
+                          <a:latin typeface="メイリオ"/>
+                          <a:ea typeface="メイリオ"/>
+                        </a:rPr>
+                        <a:t>株式・通貨</a:t>
+                      </a:r>
+                    </a:p>
+                  </a:txBody>
+                  <a:tcPr>
+                    <a:solidFill>
+                      <a:srgbClr val="FFFFFF"/>
+                    </a:solidFill>
+                  </a:tcPr>
+                </a:tc>
+                <a:tc>
+                  <a:txBody>
+                    <a:bodyPr/>
+                    <a:lstStyle/>
+                    <a:p>
+                      <a:pPr algn="r"/>
+                      <a:r>
+                        <a:rPr b="0" sz="1500">
+                          <a:solidFill>
+                            <a:srgbClr val="222222"/>
+                          </a:solidFill>
+                          <a:latin typeface="メイリオ"/>
+                          <a:ea typeface="メイリオ"/>
+                        </a:rPr>
+                        <a:t>大文字。スラッシュは削除</a:t>
+                      </a:r>
+                    </a:p>
+                  </a:txBody>
+                  <a:tcPr>
+                    <a:solidFill>
+                      <a:srgbClr val="FFFFFF"/>
+                    </a:solidFill>
+                  </a:tcPr>
+                </a:tc>
+                <a:tc>
+                  <a:txBody>
+                    <a:bodyPr/>
+                    <a:lstStyle/>
+                    <a:p>
+                      <a:pPr algn="r"/>
+                      <a:r>
+                        <a:rPr b="0" sz="1500">
+                          <a:solidFill>
+                            <a:srgbClr val="222222"/>
+                          </a:solidFill>
+                          <a:latin typeface="メイリオ"/>
+                          <a:ea typeface="メイリオ"/>
+                        </a:rPr>
+                        <a:t>ticker/USDJPY / ticker/NVDA / ticker/7974</a:t>
+                      </a:r>
+                    </a:p>
+                  </a:txBody>
+                  <a:tcPr>
+                    <a:solidFill>
+                      <a:srgbClr val="FFFFFF"/>
+                    </a:solidFill>
+                  </a:tcPr>
+                </a:tc>
+              </a:tr>
+              <a:tr h="320039">
+                <a:tc>
+                  <a:txBody>
+                    <a:bodyPr/>
+                    <a:lstStyle/>
+                    <a:p>
+                      <a:pPr algn="l"/>
+                      <a:r>
+                        <a:rPr b="1" sz="1500">
+                          <a:solidFill>
+                            <a:srgbClr val="222222"/>
+                          </a:solidFill>
+                          <a:latin typeface="メイリオ"/>
+                          <a:ea typeface="メイリオ"/>
+                        </a:rPr>
+                        <a:t>topic/</a:t>
+                      </a:r>
+                    </a:p>
+                  </a:txBody>
+                  <a:tcPr>
+                    <a:solidFill>
+                      <a:srgbClr val="D9E7F5"/>
+                    </a:solidFill>
+                  </a:tcPr>
+                </a:tc>
+                <a:tc>
+                  <a:txBody>
+                    <a:bodyPr/>
+                    <a:lstStyle/>
+                    <a:p>
+                      <a:pPr algn="r"/>
+                      <a:r>
+                        <a:rPr b="0" sz="1500">
+                          <a:solidFill>
+                            <a:srgbClr val="222222"/>
+                          </a:solidFill>
+                          <a:latin typeface="メイリオ"/>
+                          <a:ea typeface="メイリオ"/>
+                        </a:rPr>
+                        <a:t>テーマ（1〜3 個）</a:t>
+                      </a:r>
+                    </a:p>
+                  </a:txBody>
+                  <a:tcPr>
+                    <a:solidFill>
+                      <a:srgbClr val="D9E7F5"/>
+                    </a:solidFill>
+                  </a:tcPr>
+                </a:tc>
+                <a:tc>
+                  <a:txBody>
+                    <a:bodyPr/>
+                    <a:lstStyle/>
+                    <a:p>
+                      <a:pPr algn="r"/>
+                      <a:r>
+                        <a:rPr b="0" sz="1500">
+                          <a:solidFill>
+                            <a:srgbClr val="222222"/>
+                          </a:solidFill>
+                          <a:latin typeface="メイリオ"/>
+                          <a:ea typeface="メイリオ"/>
+                        </a:rPr>
+                        <a:t>日本語推奨、国際略号 OK</a:t>
+                      </a:r>
+                    </a:p>
+                  </a:txBody>
+                  <a:tcPr>
+                    <a:solidFill>
+                      <a:srgbClr val="D9E7F5"/>
+                    </a:solidFill>
+                  </a:tcPr>
+                </a:tc>
+                <a:tc>
+                  <a:txBody>
+                    <a:bodyPr/>
+                    <a:lstStyle/>
+                    <a:p>
+                      <a:pPr algn="r"/>
+                      <a:r>
+                        <a:rPr b="0" sz="1500">
+                          <a:solidFill>
+                            <a:srgbClr val="222222"/>
+                          </a:solidFill>
+                          <a:latin typeface="メイリオ"/>
+                          <a:ea typeface="メイリオ"/>
+                        </a:rPr>
+                        <a:t>topic/利下げ / topic/FOMC / topic/規制</a:t>
+                      </a:r>
+                    </a:p>
+                  </a:txBody>
+                  <a:tcPr>
+                    <a:solidFill>
+                      <a:srgbClr val="D9E7F5"/>
+                    </a:solidFill>
+                  </a:tcPr>
+                </a:tc>
+              </a:tr>
+              <a:tr h="320039">
+                <a:tc>
+                  <a:txBody>
+                    <a:bodyPr/>
+                    <a:lstStyle/>
+                    <a:p>
+                      <a:pPr algn="l"/>
+                      <a:r>
+                        <a:rPr b="1" sz="1500">
+                          <a:solidFill>
+                            <a:srgbClr val="222222"/>
+                          </a:solidFill>
+                          <a:latin typeface="メイリオ"/>
+                          <a:ea typeface="メイリオ"/>
+                        </a:rPr>
+                        <a:t>industry/</a:t>
+                      </a:r>
+                    </a:p>
+                  </a:txBody>
+                  <a:tcPr>
+                    <a:solidFill>
+                      <a:srgbClr val="FFFFFF"/>
+                    </a:solidFill>
+                  </a:tcPr>
+                </a:tc>
+                <a:tc>
+                  <a:txBody>
+                    <a:bodyPr/>
+                    <a:lstStyle/>
+                    <a:p>
+                      <a:pPr algn="r"/>
+                      <a:r>
+                        <a:rPr b="0" sz="1500">
+                          <a:solidFill>
+                            <a:srgbClr val="222222"/>
+                          </a:solidFill>
+                          <a:latin typeface="メイリオ"/>
+                          <a:ea typeface="メイリオ"/>
+                        </a:rPr>
+                        <a:t>業界（0〜2 個）</a:t>
+                      </a:r>
+                    </a:p>
+                  </a:txBody>
+                  <a:tcPr>
+                    <a:solidFill>
+                      <a:srgbClr val="FFFFFF"/>
+                    </a:solidFill>
+                  </a:tcPr>
+                </a:tc>
+                <a:tc>
+                  <a:txBody>
+                    <a:bodyPr/>
+                    <a:lstStyle/>
+                    <a:p>
+                      <a:pPr algn="r"/>
+                      <a:r>
+                        <a:rPr b="0" sz="1500">
+                          <a:solidFill>
+                            <a:srgbClr val="222222"/>
+                          </a:solidFill>
+                          <a:latin typeface="メイリオ"/>
+                          <a:ea typeface="メイリオ"/>
+                        </a:rPr>
+                        <a:t>日本語</a:t>
+                      </a:r>
+                    </a:p>
+                  </a:txBody>
+                  <a:tcPr>
+                    <a:solidFill>
+                      <a:srgbClr val="FFFFFF"/>
+                    </a:solidFill>
+                  </a:tcPr>
+                </a:tc>
+                <a:tc>
+                  <a:txBody>
+                    <a:bodyPr/>
+                    <a:lstStyle/>
+                    <a:p>
+                      <a:pPr algn="r"/>
+                      <a:r>
+                        <a:rPr b="0" sz="1500">
+                          <a:solidFill>
+                            <a:srgbClr val="222222"/>
+                          </a:solidFill>
+                          <a:latin typeface="メイリオ"/>
+                          <a:ea typeface="メイリオ"/>
+                        </a:rPr>
+                        <a:t>industry/半導体 / industry/IT-コンサル</a:t>
+                      </a:r>
+                    </a:p>
+                  </a:txBody>
+                  <a:tcPr>
+                    <a:solidFill>
+                      <a:srgbClr val="FFFFFF"/>
+                    </a:solidFill>
+                  </a:tcPr>
+                </a:tc>
+              </a:tr>
+              <a:tr h="320039">
+                <a:tc>
+                  <a:txBody>
+                    <a:bodyPr/>
+                    <a:lstStyle/>
+                    <a:p>
+                      <a:pPr algn="l"/>
+                      <a:r>
+                        <a:rPr b="1" sz="1500">
+                          <a:solidFill>
+                            <a:srgbClr val="222222"/>
+                          </a:solidFill>
+                          <a:latin typeface="メイリオ"/>
+                          <a:ea typeface="メイリオ"/>
+                        </a:rPr>
+                        <a:t>event/</a:t>
+                      </a:r>
+                    </a:p>
+                  </a:txBody>
+                  <a:tcPr>
+                    <a:solidFill>
+                      <a:srgbClr val="D9E7F5"/>
+                    </a:solidFill>
+                  </a:tcPr>
+                </a:tc>
+                <a:tc>
+                  <a:txBody>
+                    <a:bodyPr/>
+                    <a:lstStyle/>
+                    <a:p>
+                      <a:pPr algn="r"/>
+                      <a:r>
+                        <a:rPr b="0" sz="1500">
+                          <a:solidFill>
+                            <a:srgbClr val="222222"/>
+                          </a:solidFill>
+                          <a:latin typeface="メイリオ"/>
+                          <a:ea typeface="メイリオ"/>
+                        </a:rPr>
+                        <a:t>イベント種別（0〜2 個）</a:t>
+                      </a:r>
+                    </a:p>
+                  </a:txBody>
+                  <a:tcPr>
+                    <a:solidFill>
+                      <a:srgbClr val="D9E7F5"/>
+                    </a:solidFill>
+                  </a:tcPr>
+                </a:tc>
+                <a:tc>
+                  <a:txBody>
+                    <a:bodyPr/>
+                    <a:lstStyle/>
+                    <a:p>
+                      <a:pPr algn="r"/>
+                      <a:r>
+                        <a:rPr b="0" sz="1500">
+                          <a:solidFill>
+                            <a:srgbClr val="222222"/>
+                          </a:solidFill>
+                          <a:latin typeface="メイリオ"/>
+                          <a:ea typeface="メイリオ"/>
+                        </a:rPr>
+                        <a:t>日本語</a:t>
+                      </a:r>
+                    </a:p>
+                  </a:txBody>
+                  <a:tcPr>
+                    <a:solidFill>
+                      <a:srgbClr val="D9E7F5"/>
+                    </a:solidFill>
+                  </a:tcPr>
+                </a:tc>
+                <a:tc>
+                  <a:txBody>
+                    <a:bodyPr/>
+                    <a:lstStyle/>
+                    <a:p>
+                      <a:pPr algn="r"/>
+                      <a:r>
+                        <a:rPr b="0" sz="1500">
+                          <a:solidFill>
+                            <a:srgbClr val="222222"/>
+                          </a:solidFill>
+                          <a:latin typeface="メイリオ"/>
+                          <a:ea typeface="メイリオ"/>
+                        </a:rPr>
+                        <a:t>event/決算 / event/製品発表 / event/政策会合</a:t>
+                      </a:r>
+                    </a:p>
+                  </a:txBody>
+                  <a:tcPr>
+                    <a:solidFill>
+                      <a:srgbClr val="D9E7F5"/>
+                    </a:solidFill>
+                  </a:tcPr>
+                </a:tc>
+              </a:tr>
+              <a:tr h="320050">
+                <a:tc>
+                  <a:txBody>
+                    <a:bodyPr/>
+                    <a:lstStyle/>
+                    <a:p>
+                      <a:pPr algn="l"/>
+                      <a:r>
+                        <a:rPr b="1" sz="1500">
+                          <a:solidFill>
+                            <a:srgbClr val="222222"/>
+                          </a:solidFill>
+                          <a:latin typeface="メイリオ"/>
+                          <a:ea typeface="メイリオ"/>
+                        </a:rPr>
+                        <a:t>score/</a:t>
+                      </a:r>
+                    </a:p>
+                  </a:txBody>
+                  <a:tcPr>
+                    <a:solidFill>
+                      <a:srgbClr val="FFFFFF"/>
+                    </a:solidFill>
+                  </a:tcPr>
+                </a:tc>
+                <a:tc>
+                  <a:txBody>
+                    <a:bodyPr/>
+                    <a:lstStyle/>
+                    <a:p>
+                      <a:pPr algn="r"/>
+                      <a:r>
+                        <a:rPr b="0" sz="1500">
+                          <a:solidFill>
+                            <a:srgbClr val="222222"/>
+                          </a:solidFill>
+                          <a:latin typeface="メイリオ"/>
+                          <a:ea typeface="メイリオ"/>
+                        </a:rPr>
+                        <a:t>重要度</a:t>
+                      </a:r>
+                    </a:p>
+                  </a:txBody>
+                  <a:tcPr>
+                    <a:solidFill>
+                      <a:srgbClr val="FFFFFF"/>
+                    </a:solidFill>
+                  </a:tcPr>
+                </a:tc>
+                <a:tc>
+                  <a:txBody>
+                    <a:bodyPr/>
+                    <a:lstStyle/>
+                    <a:p>
+                      <a:pPr algn="r"/>
+                      <a:r>
+                        <a:rPr b="0" sz="1500">
+                          <a:solidFill>
+                            <a:srgbClr val="222222"/>
+                          </a:solidFill>
+                          <a:latin typeface="メイリオ"/>
+                          <a:ea typeface="メイリオ"/>
+                        </a:rPr>
+                        <a:t>高 (≥85) / 中 (65-84) / 低 (&lt;65)</a:t>
+                      </a:r>
+                    </a:p>
+                  </a:txBody>
+                  <a:tcPr>
+                    <a:solidFill>
+                      <a:srgbClr val="FFFFFF"/>
+                    </a:solidFill>
+                  </a:tcPr>
+                </a:tc>
+                <a:tc>
+                  <a:txBody>
+                    <a:bodyPr/>
+                    <a:lstStyle/>
+                    <a:p>
+                      <a:pPr algn="r"/>
+                      <a:r>
+                        <a:rPr b="0" sz="1500">
+                          <a:solidFill>
+                            <a:srgbClr val="222222"/>
+                          </a:solidFill>
+                          <a:latin typeface="メイリオ"/>
+                          <a:ea typeface="メイリオ"/>
+                        </a:rPr>
+                        <a:t>score/高 / score/中 / score/低</a:t>
+                      </a:r>
+                    </a:p>
+                  </a:txBody>
+                  <a:tcPr>
+                    <a:solidFill>
+                      <a:srgbClr val="FFFFFF"/>
+                    </a:solidFill>
+                  </a:tcPr>
+                </a:tc>
+              </a:tr>
+            </a:tbl>
+          </a:graphicData>
+        </a:graphic>
+      </p:graphicFrame>
+      <p:sp>
+        <p:nvSpPr>
+          <p:cNvPr id="6" name="Rectangle 5"/>
+          <p:cNvSpPr/>
+          <p:nvPr/>
+        </p:nvSpPr>
+        <p:spPr>
+          <a:xfrm>
+            <a:off x="457200" y="5257800"/>
+            <a:ext cx="11277295" cy="1005839"/>
+          </a:xfrm>
+          <a:prstGeom prst="rect">
+            <a:avLst/>
+          </a:prstGeom>
+          <a:solidFill>
+            <a:srgbClr val="D9E7F5"/>
+          </a:solidFill>
+          <a:ln>
+            <a:noFill/>
+          </a:ln>
+        </p:spPr>
+        <p:style>
+          <a:lnRef idx="1">
+            <a:schemeClr val="accent1"/>
+          </a:lnRef>
+          <a:fillRef idx="3">
+            <a:schemeClr val="accent1"/>
+          </a:fillRef>
+          <a:effectRef idx="2">
+            <a:schemeClr val="accent1"/>
+          </a:effectRef>
+          <a:fontRef idx="minor">
+            <a:schemeClr val="lt1"/>
+          </a:fontRef>
+        </p:style>
+        <p:txBody>
+          <a:bodyPr rtlCol="0" anchor="ctr"/>
+          <a:lstStyle/>
+          <a:p>
+            <a:pPr algn="ctr"/>
+          </a:p>
+        </p:txBody>
+      </p:sp>
+      <p:sp>
+        <p:nvSpPr>
+          <p:cNvPr id="7" name="TextBox 6"/>
+          <p:cNvSpPr txBox="1"/>
+          <p:nvPr/>
+        </p:nvSpPr>
+        <p:spPr>
+          <a:xfrm>
+            <a:off x="640080" y="5330952"/>
+            <a:ext cx="10911535" cy="868680"/>
+          </a:xfrm>
+          <a:prstGeom prst="rect">
+            <a:avLst/>
+          </a:prstGeom>
+          <a:noFill/>
+        </p:spPr>
+        <p:txBody>
+          <a:bodyPr wrap="square" lIns="0" rIns="0" tIns="0" bIns="0">
+            <a:spAutoFit/>
+          </a:bodyPr>
+          <a:lstStyle/>
+          <a:p>
+            <a:pPr marL="228600" indent="-228600">
+              <a:buClr>
+                <a:srgbClr val="222222"/>
+              </a:buClr>
+              <a:lnSpc>
+                <a:spcPct val="135000"/>
+              </a:lnSpc>
+              <a:buFont typeface="Arial"/>
+              <a:buChar char="●"/>
+            </a:pPr>
+            <a:r>
+              <a:rPr b="0" sz="1600">
+                <a:solidFill>
+                  <a:srgbClr val="222222"/>
+                </a:solidFill>
+                <a:latin typeface="メイリオ"/>
+                <a:ea typeface="メイリオ"/>
+              </a:rPr>
+              <a:t>タグ値で使えない文字：半角スペース → '-'、スラッシュ '/' → 削除、ピリオド '.' → '_'。中点 '・' と長音 'ー' は OK</a:t>
+            </a:r>
+          </a:p>
+          <a:p>
+            <a:pPr marL="228600" indent="-228600">
+              <a:buClr>
+                <a:srgbClr val="222222"/>
+              </a:buClr>
+              <a:lnSpc>
+                <a:spcPct val="135000"/>
+              </a:lnSpc>
+              <a:buFont typeface="Arial"/>
+              <a:buChar char="●"/>
+            </a:pPr>
+            <a:r>
+              <a:rPr b="0" sz="1600">
+                <a:solidFill>
+                  <a:srgbClr val="222222"/>
+                </a:solidFill>
+                <a:latin typeface="メイリオ"/>
+                <a:ea typeface="メイリオ"/>
+              </a:rPr>
+              <a:t>Runner は記事要約と同じターンで entities/topics/industries/events を JSON 出力 → tags[] に階層化して frontmatter / 記事カード行内 / articles.jsonl に展開</a:t>
+            </a:r>
+          </a:p>
+          <a:p>
+            <a:pPr marL="228600" indent="-228600">
+              <a:buClr>
+                <a:srgbClr val="222222"/>
+              </a:buClr>
+              <a:lnSpc>
+                <a:spcPct val="135000"/>
+              </a:lnSpc>
+              <a:buFont typeface="Arial"/>
+              <a:buChar char="●"/>
+            </a:pPr>
+            <a:r>
+              <a:rPr b="0" sz="1600">
+                <a:solidFill>
+                  <a:srgbClr val="222222"/>
+                </a:solidFill>
+                <a:latin typeface="メイリオ"/>
+                <a:ea typeface="メイリオ"/>
+              </a:rPr>
+              <a:t>正本仕様: prompts/obsidian-tagging-spec.md（毎回 Read で読み込む）</a:t>
+            </a:r>
+          </a:p>
+        </p:txBody>
+      </p:sp>
+    </p:spTree>
+  </p:cSld>
+  <p:clrMapOvr>
+    <a:masterClrMapping/>
+  </p:clrMapOvr>
+</p:sld>
+</file>
+
+<file path=ppt/slides/slide7.xml><?xml version="1.0" encoding="utf-8"?>
 <p:sld xmlns:a="http://schemas.openxmlformats.org/drawingml/2006/main" xmlns:p="http://schemas.openxmlformats.org/presentationml/2006/main" xmlns:r="http://schemas.openxmlformats.org/officeDocument/2006/relationships">
   <p:cSld>
     <p:spTree>
@@ -10803,7 +13092,7 @@
 </p:sld>
 </file>
 
-<file path=ppt/slides/slide7.xml><?xml version="1.0" encoding="utf-8"?>
+<file path=ppt/slides/slide8.xml><?xml version="1.0" encoding="utf-8"?>
 <p:sld xmlns:a="http://schemas.openxmlformats.org/drawingml/2006/main" xmlns:p="http://schemas.openxmlformats.org/presentationml/2006/main" xmlns:r="http://schemas.openxmlformats.org/officeDocument/2006/relationships">
   <p:cSld>
     <p:spTree>
@@ -11487,7 +13776,7 @@
 </p:sld>
 </file>
 
-<file path=ppt/slides/slide8.xml><?xml version="1.0" encoding="utf-8"?>
+<file path=ppt/slides/slide9.xml><?xml version="1.0" encoding="utf-8"?>
 <p:sld xmlns:a="http://schemas.openxmlformats.org/drawingml/2006/main" xmlns:p="http://schemas.openxmlformats.org/presentationml/2006/main" xmlns:r="http://schemas.openxmlformats.org/officeDocument/2006/relationships">
   <p:cSld>
     <p:spTree>
@@ -12380,734 +14669,6 @@
                 <a:ea typeface="メイリオ"/>
               </a:rPr>
               <a:t>5 カテゴリ × 10 件 + 5 セクション考察 + サムネ OGP 取得で約 80-120k トークン入力 / 8-12k トークン出力</a:t>
-            </a:r>
-          </a:p>
-        </p:txBody>
-      </p:sp>
-    </p:spTree>
-  </p:cSld>
-  <p:clrMapOvr>
-    <a:masterClrMapping/>
-  </p:clrMapOvr>
-</p:sld>
-</file>
-
-<file path=ppt/slides/slide9.xml><?xml version="1.0" encoding="utf-8"?>
-<p:sld xmlns:a="http://schemas.openxmlformats.org/drawingml/2006/main" xmlns:p="http://schemas.openxmlformats.org/presentationml/2006/main" xmlns:r="http://schemas.openxmlformats.org/officeDocument/2006/relationships">
-  <p:cSld>
-    <p:spTree>
-      <p:nvGrpSpPr>
-        <p:cNvPr id="1" name=""/>
-        <p:cNvGrpSpPr/>
-        <p:nvPr/>
-      </p:nvGrpSpPr>
-      <p:grpSpPr/>
-      <p:sp>
-        <p:nvSpPr>
-          <p:cNvPr id="2" name="Rectangle 1"/>
-          <p:cNvSpPr/>
-          <p:nvPr/>
-        </p:nvSpPr>
-        <p:spPr>
-          <a:xfrm>
-            <a:off x="457200" y="365760"/>
-            <a:ext cx="45720" cy="548640"/>
-          </a:xfrm>
-          <a:prstGeom prst="rect">
-            <a:avLst/>
-          </a:prstGeom>
-          <a:solidFill>
-            <a:srgbClr val="1F3A7A"/>
-          </a:solidFill>
-          <a:ln>
-            <a:noFill/>
-          </a:ln>
-        </p:spPr>
-        <p:style>
-          <a:lnRef idx="1">
-            <a:schemeClr val="accent1"/>
-          </a:lnRef>
-          <a:fillRef idx="3">
-            <a:schemeClr val="accent1"/>
-          </a:fillRef>
-          <a:effectRef idx="2">
-            <a:schemeClr val="accent1"/>
-          </a:effectRef>
-          <a:fontRef idx="minor">
-            <a:schemeClr val="lt1"/>
-          </a:fontRef>
-        </p:style>
-        <p:txBody>
-          <a:bodyPr rtlCol="0" anchor="ctr"/>
-          <a:lstStyle/>
-          <a:p>
-            <a:pPr algn="ctr"/>
-          </a:p>
-        </p:txBody>
-      </p:sp>
-      <p:sp>
-        <p:nvSpPr>
-          <p:cNvPr id="3" name="TextBox 2"/>
-          <p:cNvSpPr txBox="1"/>
-          <p:nvPr/>
-        </p:nvSpPr>
-        <p:spPr>
-          <a:xfrm>
-            <a:off x="621792" y="338328"/>
-            <a:ext cx="11094415" cy="228600"/>
-          </a:xfrm>
-          <a:prstGeom prst="rect">
-            <a:avLst/>
-          </a:prstGeom>
-          <a:noFill/>
-        </p:spPr>
-        <p:txBody>
-          <a:bodyPr wrap="square" lIns="0" rIns="0" tIns="0" bIns="0">
-            <a:spAutoFit/>
-          </a:bodyPr>
-          <a:lstStyle/>
-          <a:p>
-            <a:r>
-              <a:rPr b="1" sz="1700">
-                <a:solidFill>
-                  <a:srgbClr val="1F3A7A"/>
-                </a:solidFill>
-                <a:latin typeface="メイリオ"/>
-                <a:ea typeface="メイリオ"/>
-              </a:rPr>
-              <a:t>業績ポイント</a:t>
-            </a:r>
-          </a:p>
-        </p:txBody>
-      </p:sp>
-      <p:sp>
-        <p:nvSpPr>
-          <p:cNvPr id="4" name="TextBox 3"/>
-          <p:cNvSpPr txBox="1"/>
-          <p:nvPr/>
-        </p:nvSpPr>
-        <p:spPr>
-          <a:xfrm>
-            <a:off x="621792" y="548640"/>
-            <a:ext cx="11094415" cy="457200"/>
-          </a:xfrm>
-          <a:prstGeom prst="rect">
-            <a:avLst/>
-          </a:prstGeom>
-          <a:noFill/>
-        </p:spPr>
-        <p:txBody>
-          <a:bodyPr wrap="square" lIns="0" rIns="0" tIns="0" bIns="0">
-            <a:spAutoFit/>
-          </a:bodyPr>
-          <a:lstStyle/>
-          <a:p>
-            <a:pPr>
-              <a:lnSpc>
-                <a:spcPct val="105000"/>
-              </a:lnSpc>
-            </a:pPr>
-            <a:r>
-              <a:rPr b="1" sz="3000">
-                <a:solidFill>
-                  <a:srgbClr val="1F3A7A"/>
-                </a:solidFill>
-                <a:latin typeface="メイリオ"/>
-                <a:ea typeface="メイリオ"/>
-              </a:rPr>
-              <a:t>POINTS</a:t>
-            </a:r>
-          </a:p>
-        </p:txBody>
-      </p:sp>
-      <p:sp>
-        <p:nvSpPr>
-          <p:cNvPr id="5" name="Rectangle 4"/>
-          <p:cNvSpPr/>
-          <p:nvPr/>
-        </p:nvSpPr>
-        <p:spPr>
-          <a:xfrm>
-            <a:off x="457200" y="1280160"/>
-            <a:ext cx="2926080" cy="2331720"/>
-          </a:xfrm>
-          <a:prstGeom prst="rect">
-            <a:avLst/>
-          </a:prstGeom>
-          <a:solidFill>
-            <a:srgbClr val="162B5C"/>
-          </a:solidFill>
-          <a:ln>
-            <a:noFill/>
-          </a:ln>
-        </p:spPr>
-        <p:style>
-          <a:lnRef idx="1">
-            <a:schemeClr val="accent1"/>
-          </a:lnRef>
-          <a:fillRef idx="3">
-            <a:schemeClr val="accent1"/>
-          </a:fillRef>
-          <a:effectRef idx="2">
-            <a:schemeClr val="accent1"/>
-          </a:effectRef>
-          <a:fontRef idx="minor">
-            <a:schemeClr val="lt1"/>
-          </a:fontRef>
-        </p:style>
-        <p:txBody>
-          <a:bodyPr rtlCol="0" anchor="ctr"/>
-          <a:lstStyle/>
-          <a:p>
-            <a:pPr algn="ctr"/>
-          </a:p>
-        </p:txBody>
-      </p:sp>
-      <p:sp>
-        <p:nvSpPr>
-          <p:cNvPr id="6" name="TextBox 5"/>
-          <p:cNvSpPr txBox="1"/>
-          <p:nvPr/>
-        </p:nvSpPr>
-        <p:spPr>
-          <a:xfrm>
-            <a:off x="640080" y="1463039"/>
-            <a:ext cx="2560320" cy="1965960"/>
-          </a:xfrm>
-          <a:prstGeom prst="rect">
-            <a:avLst/>
-          </a:prstGeom>
-          <a:noFill/>
-        </p:spPr>
-        <p:txBody>
-          <a:bodyPr wrap="square" lIns="0" rIns="0" tIns="0" bIns="0" anchor="ctr">
-            <a:spAutoFit/>
-          </a:bodyPr>
-          <a:lstStyle/>
-          <a:p>
-            <a:pPr algn="ctr"/>
-            <a:r>
-              <a:rPr b="1" sz="2200">
-                <a:solidFill>
-                  <a:srgbClr val="FFFFFF"/>
-                </a:solidFill>
-                <a:latin typeface="メイリオ"/>
-                <a:ea typeface="メイリオ"/>
-              </a:rPr>
-              <a:t>ファイル</a:t>
-            </a:r>
-          </a:p>
-          <a:p>
-            <a:pPr algn="ctr"/>
-            <a:r>
-              <a:rPr b="1" sz="2200">
-                <a:solidFill>
-                  <a:srgbClr val="FFFFFF"/>
-                </a:solidFill>
-                <a:latin typeface="メイリオ"/>
-                <a:ea typeface="メイリオ"/>
-              </a:rPr>
-              <a:t>構造</a:t>
-            </a:r>
-          </a:p>
-        </p:txBody>
-      </p:sp>
-      <p:sp>
-        <p:nvSpPr>
-          <p:cNvPr id="7" name="TextBox 6"/>
-          <p:cNvSpPr txBox="1"/>
-          <p:nvPr/>
-        </p:nvSpPr>
-        <p:spPr>
-          <a:xfrm>
-            <a:off x="640080" y="3154679"/>
-            <a:ext cx="2560320" cy="365760"/>
-          </a:xfrm>
-          <a:prstGeom prst="rect">
-            <a:avLst/>
-          </a:prstGeom>
-          <a:noFill/>
-        </p:spPr>
-        <p:txBody>
-          <a:bodyPr wrap="square" lIns="0" rIns="0" tIns="0" bIns="0">
-            <a:spAutoFit/>
-          </a:bodyPr>
-          <a:lstStyle/>
-          <a:p>
-            <a:pPr algn="ctr"/>
-            <a:r>
-              <a:rPr b="1" sz="1700">
-                <a:solidFill>
-                  <a:srgbClr val="D9E7F5"/>
-                </a:solidFill>
-                <a:latin typeface="メイリオ"/>
-                <a:ea typeface="メイリオ"/>
-              </a:rPr>
-              <a:t>リポジトリ構成</a:t>
-            </a:r>
-          </a:p>
-        </p:txBody>
-      </p:sp>
-      <p:sp>
-        <p:nvSpPr>
-          <p:cNvPr id="8" name="TextBox 7"/>
-          <p:cNvSpPr txBox="1"/>
-          <p:nvPr/>
-        </p:nvSpPr>
-        <p:spPr>
-          <a:xfrm>
-            <a:off x="3703320" y="1325880"/>
-            <a:ext cx="8031175" cy="457200"/>
-          </a:xfrm>
-          <a:prstGeom prst="rect">
-            <a:avLst/>
-          </a:prstGeom>
-          <a:noFill/>
-        </p:spPr>
-        <p:txBody>
-          <a:bodyPr wrap="square" lIns="0" rIns="0" tIns="0" bIns="0">
-            <a:spAutoFit/>
-          </a:bodyPr>
-          <a:lstStyle/>
-          <a:p>
-            <a:r>
-              <a:rPr b="1" sz="2200">
-                <a:solidFill>
-                  <a:srgbClr val="1F3A7A"/>
-                </a:solidFill>
-                <a:latin typeface="メイリオ"/>
-                <a:ea typeface="メイリオ"/>
-              </a:rPr>
-              <a:t>■ リポジトリ構成</a:t>
-            </a:r>
-          </a:p>
-        </p:txBody>
-      </p:sp>
-      <p:sp>
-        <p:nvSpPr>
-          <p:cNvPr id="9" name="TextBox 8"/>
-          <p:cNvSpPr txBox="1"/>
-          <p:nvPr/>
-        </p:nvSpPr>
-        <p:spPr>
-          <a:xfrm>
-            <a:off x="3703320" y="1828800"/>
-            <a:ext cx="8031175" cy="1691639"/>
-          </a:xfrm>
-          <a:prstGeom prst="rect">
-            <a:avLst/>
-          </a:prstGeom>
-          <a:noFill/>
-        </p:spPr>
-        <p:txBody>
-          <a:bodyPr wrap="square" lIns="0" rIns="0" tIns="0" bIns="0">
-            <a:spAutoFit/>
-          </a:bodyPr>
-          <a:lstStyle/>
-          <a:p>
-            <a:pPr marL="228600" indent="-228600">
-              <a:buClr>
-                <a:srgbClr val="222222"/>
-              </a:buClr>
-              <a:lnSpc>
-                <a:spcPct val="140000"/>
-              </a:lnSpc>
-              <a:buFont typeface="Arial"/>
-              <a:buChar char="●"/>
-            </a:pPr>
-            <a:r>
-              <a:rPr b="0" sz="1800">
-                <a:solidFill>
-                  <a:srgbClr val="222222"/>
-                </a:solidFill>
-                <a:latin typeface="メイリオ"/>
-                <a:ea typeface="メイリオ"/>
-              </a:rPr>
-              <a:t>digest/{FX,AI,IT-Consulting,Economy,Game}/ — カテゴリ別フォルダで管理</a:t>
-            </a:r>
-          </a:p>
-          <a:p>
-            <a:pPr marL="228600" indent="-228600">
-              <a:buClr>
-                <a:srgbClr val="222222"/>
-              </a:buClr>
-              <a:lnSpc>
-                <a:spcPct val="140000"/>
-              </a:lnSpc>
-              <a:buFont typeface="Arial"/>
-              <a:buChar char="●"/>
-            </a:pPr>
-            <a:r>
-              <a:rPr b="0" sz="1800">
-                <a:solidFill>
-                  <a:srgbClr val="222222"/>
-                </a:solidFill>
-                <a:latin typeface="メイリオ"/>
-                <a:ea typeface="メイリオ"/>
-              </a:rPr>
-              <a:t>digest/Summary/ — 日次サマリー（テーマ考察ハブ）</a:t>
-            </a:r>
-          </a:p>
-          <a:p>
-            <a:pPr marL="228600" indent="-228600">
-              <a:buClr>
-                <a:srgbClr val="222222"/>
-              </a:buClr>
-              <a:lnSpc>
-                <a:spcPct val="140000"/>
-              </a:lnSpc>
-              <a:buFont typeface="Arial"/>
-              <a:buChar char="●"/>
-            </a:pPr>
-            <a:r>
-              <a:rPr b="0" sz="1800">
-                <a:solidFill>
-                  <a:srgbClr val="222222"/>
-                </a:solidFill>
-                <a:latin typeface="メイリオ"/>
-                <a:ea typeface="メイリオ"/>
-              </a:rPr>
-              <a:t>data/watchlist.md — ★ ユーザー編集可、トラッキング対象一覧</a:t>
-            </a:r>
-          </a:p>
-          <a:p>
-            <a:pPr marL="228600" indent="-228600">
-              <a:buClr>
-                <a:srgbClr val="222222"/>
-              </a:buClr>
-              <a:lnSpc>
-                <a:spcPct val="140000"/>
-              </a:lnSpc>
-              <a:buFont typeface="Arial"/>
-              <a:buChar char="●"/>
-            </a:pPr>
-            <a:r>
-              <a:rPr b="0" sz="1800">
-                <a:solidFill>
-                  <a:srgbClr val="222222"/>
-                </a:solidFill>
-                <a:latin typeface="メイリオ"/>
-                <a:ea typeface="メイリオ"/>
-              </a:rPr>
-              <a:t>data/articles.jsonl — 過去 90 日の記事メタ（自動ローテート）</a:t>
-            </a:r>
-          </a:p>
-          <a:p>
-            <a:pPr marL="228600" indent="-228600">
-              <a:buClr>
-                <a:srgbClr val="222222"/>
-              </a:buClr>
-              <a:lnSpc>
-                <a:spcPct val="140000"/>
-              </a:lnSpc>
-              <a:buFont typeface="Arial"/>
-              <a:buChar char="●"/>
-            </a:pPr>
-            <a:r>
-              <a:rPr b="0" sz="1800">
-                <a:solidFill>
-                  <a:srgbClr val="222222"/>
-                </a:solidFill>
-                <a:latin typeface="メイリオ"/>
-                <a:ea typeface="メイリオ"/>
-              </a:rPr>
-              <a:t>prompts/routine-system.md / email-template.html / obsidian-template.md</a:t>
-            </a:r>
-          </a:p>
-          <a:p>
-            <a:pPr marL="228600" indent="-228600">
-              <a:buClr>
-                <a:srgbClr val="222222"/>
-              </a:buClr>
-              <a:lnSpc>
-                <a:spcPct val="140000"/>
-              </a:lnSpc>
-              <a:buFont typeface="Arial"/>
-              <a:buChar char="●"/>
-            </a:pPr>
-            <a:r>
-              <a:rPr b="0" sz="1800">
-                <a:solidFill>
-                  <a:srgbClr val="222222"/>
-                </a:solidFill>
-                <a:latin typeface="メイリオ"/>
-                <a:ea typeface="メイリオ"/>
-              </a:rPr>
-              <a:t>assets/ng-thumb-{cat}.jpg + ng-thumb-common-{cat}.jpg（v2 Claude Design 提供 10 枚）</a:t>
-            </a:r>
-          </a:p>
-        </p:txBody>
-      </p:sp>
-      <p:sp>
-        <p:nvSpPr>
-          <p:cNvPr id="10" name="Rectangle 9"/>
-          <p:cNvSpPr/>
-          <p:nvPr/>
-        </p:nvSpPr>
-        <p:spPr>
-          <a:xfrm>
-            <a:off x="457200" y="3886200"/>
-            <a:ext cx="2926080" cy="2331720"/>
-          </a:xfrm>
-          <a:prstGeom prst="rect">
-            <a:avLst/>
-          </a:prstGeom>
-          <a:solidFill>
-            <a:srgbClr val="162B5C"/>
-          </a:solidFill>
-          <a:ln>
-            <a:noFill/>
-          </a:ln>
-        </p:spPr>
-        <p:style>
-          <a:lnRef idx="1">
-            <a:schemeClr val="accent1"/>
-          </a:lnRef>
-          <a:fillRef idx="3">
-            <a:schemeClr val="accent1"/>
-          </a:fillRef>
-          <a:effectRef idx="2">
-            <a:schemeClr val="accent1"/>
-          </a:effectRef>
-          <a:fontRef idx="minor">
-            <a:schemeClr val="lt1"/>
-          </a:fontRef>
-        </p:style>
-        <p:txBody>
-          <a:bodyPr rtlCol="0" anchor="ctr"/>
-          <a:lstStyle/>
-          <a:p>
-            <a:pPr algn="ctr"/>
-          </a:p>
-        </p:txBody>
-      </p:sp>
-      <p:sp>
-        <p:nvSpPr>
-          <p:cNvPr id="11" name="TextBox 10"/>
-          <p:cNvSpPr txBox="1"/>
-          <p:nvPr/>
-        </p:nvSpPr>
-        <p:spPr>
-          <a:xfrm>
-            <a:off x="640080" y="4069080"/>
-            <a:ext cx="2560320" cy="1965960"/>
-          </a:xfrm>
-          <a:prstGeom prst="rect">
-            <a:avLst/>
-          </a:prstGeom>
-          <a:noFill/>
-        </p:spPr>
-        <p:txBody>
-          <a:bodyPr wrap="square" lIns="0" rIns="0" tIns="0" bIns="0" anchor="ctr">
-            <a:spAutoFit/>
-          </a:bodyPr>
-          <a:lstStyle/>
-          <a:p>
-            <a:pPr algn="ctr"/>
-            <a:r>
-              <a:rPr b="1" sz="2200">
-                <a:solidFill>
-                  <a:srgbClr val="FFFFFF"/>
-                </a:solidFill>
-                <a:latin typeface="メイリオ"/>
-                <a:ea typeface="メイリオ"/>
-              </a:rPr>
-              <a:t>ファイル</a:t>
-            </a:r>
-          </a:p>
-          <a:p>
-            <a:pPr algn="ctr"/>
-            <a:r>
-              <a:rPr b="1" sz="2200">
-                <a:solidFill>
-                  <a:srgbClr val="FFFFFF"/>
-                </a:solidFill>
-                <a:latin typeface="メイリオ"/>
-                <a:ea typeface="メイリオ"/>
-              </a:rPr>
-              <a:t>構造</a:t>
-            </a:r>
-          </a:p>
-        </p:txBody>
-      </p:sp>
-      <p:sp>
-        <p:nvSpPr>
-          <p:cNvPr id="12" name="TextBox 11"/>
-          <p:cNvSpPr txBox="1"/>
-          <p:nvPr/>
-        </p:nvSpPr>
-        <p:spPr>
-          <a:xfrm>
-            <a:off x="640080" y="5760720"/>
-            <a:ext cx="2560320" cy="365760"/>
-          </a:xfrm>
-          <a:prstGeom prst="rect">
-            <a:avLst/>
-          </a:prstGeom>
-          <a:noFill/>
-        </p:spPr>
-        <p:txBody>
-          <a:bodyPr wrap="square" lIns="0" rIns="0" tIns="0" bIns="0">
-            <a:spAutoFit/>
-          </a:bodyPr>
-          <a:lstStyle/>
-          <a:p>
-            <a:pPr algn="ctr"/>
-            <a:r>
-              <a:rPr b="1" sz="1700">
-                <a:solidFill>
-                  <a:srgbClr val="D9E7F5"/>
-                </a:solidFill>
-                <a:latin typeface="メイリオ"/>
-                <a:ea typeface="メイリオ"/>
-              </a:rPr>
-              <a:t>単体テスト機構</a:t>
-            </a:r>
-          </a:p>
-        </p:txBody>
-      </p:sp>
-      <p:sp>
-        <p:nvSpPr>
-          <p:cNvPr id="13" name="TextBox 12"/>
-          <p:cNvSpPr txBox="1"/>
-          <p:nvPr/>
-        </p:nvSpPr>
-        <p:spPr>
-          <a:xfrm>
-            <a:off x="3703320" y="3931920"/>
-            <a:ext cx="8031175" cy="457200"/>
-          </a:xfrm>
-          <a:prstGeom prst="rect">
-            <a:avLst/>
-          </a:prstGeom>
-          <a:noFill/>
-        </p:spPr>
-        <p:txBody>
-          <a:bodyPr wrap="square" lIns="0" rIns="0" tIns="0" bIns="0">
-            <a:spAutoFit/>
-          </a:bodyPr>
-          <a:lstStyle/>
-          <a:p>
-            <a:r>
-              <a:rPr b="1" sz="2200">
-                <a:solidFill>
-                  <a:srgbClr val="1F3A7A"/>
-                </a:solidFill>
-                <a:latin typeface="メイリオ"/>
-                <a:ea typeface="メイリオ"/>
-              </a:rPr>
-              <a:t>■ 単体テスト機構</a:t>
-            </a:r>
-          </a:p>
-        </p:txBody>
-      </p:sp>
-      <p:sp>
-        <p:nvSpPr>
-          <p:cNvPr id="14" name="TextBox 13"/>
-          <p:cNvSpPr txBox="1"/>
-          <p:nvPr/>
-        </p:nvSpPr>
-        <p:spPr>
-          <a:xfrm>
-            <a:off x="3703320" y="4434840"/>
-            <a:ext cx="8031175" cy="1691639"/>
-          </a:xfrm>
-          <a:prstGeom prst="rect">
-            <a:avLst/>
-          </a:prstGeom>
-          <a:noFill/>
-        </p:spPr>
-        <p:txBody>
-          <a:bodyPr wrap="square" lIns="0" rIns="0" tIns="0" bIns="0">
-            <a:spAutoFit/>
-          </a:bodyPr>
-          <a:lstStyle/>
-          <a:p>
-            <a:pPr marL="228600" indent="-228600">
-              <a:buClr>
-                <a:srgbClr val="222222"/>
-              </a:buClr>
-              <a:lnSpc>
-                <a:spcPct val="140000"/>
-              </a:lnSpc>
-              <a:buFont typeface="Arial"/>
-              <a:buChar char="●"/>
-            </a:pPr>
-            <a:r>
-              <a:rPr b="0" sz="1800">
-                <a:solidFill>
-                  <a:srgbClr val="222222"/>
-                </a:solidFill>
-                <a:latin typeface="メイリオ"/>
-                <a:ea typeface="メイリオ"/>
-              </a:rPr>
-              <a:t>tests/render_email.py — Claude を呼ばずに HTML テンプレートだけ確認</a:t>
-            </a:r>
-          </a:p>
-          <a:p>
-            <a:pPr marL="228600" indent="-228600">
-              <a:buClr>
-                <a:srgbClr val="222222"/>
-              </a:buClr>
-              <a:lnSpc>
-                <a:spcPct val="140000"/>
-              </a:lnSpc>
-              <a:buFont typeface="Arial"/>
-              <a:buChar char="●"/>
-            </a:pPr>
-            <a:r>
-              <a:rPr b="0" sz="1800">
-                <a:solidFill>
-                  <a:srgbClr val="222222"/>
-                </a:solidFill>
-                <a:latin typeface="メイリオ"/>
-                <a:ea typeface="メイリオ"/>
-              </a:rPr>
-              <a:t>A) python tests/render_email.py — preview.html 生成（$0 / 1-2 秒）</a:t>
-            </a:r>
-          </a:p>
-          <a:p>
-            <a:pPr marL="228600" indent="-228600">
-              <a:buClr>
-                <a:srgbClr val="222222"/>
-              </a:buClr>
-              <a:lnSpc>
-                <a:spcPct val="140000"/>
-              </a:lnSpc>
-              <a:buFont typeface="Arial"/>
-              <a:buChar char="●"/>
-            </a:pPr>
-            <a:r>
-              <a:rPr b="0" sz="1800">
-                <a:solidFill>
-                  <a:srgbClr val="222222"/>
-                </a:solidFill>
-                <a:latin typeface="メイリオ"/>
-                <a:ea typeface="メイリオ"/>
-              </a:rPr>
-              <a:t>C) python tests/render_email.py --send — Webhook 経由で実送信（$0 / 5-10 秒）</a:t>
-            </a:r>
-          </a:p>
-          <a:p>
-            <a:pPr marL="228600" indent="-228600">
-              <a:buClr>
-                <a:srgbClr val="222222"/>
-              </a:buClr>
-              <a:lnSpc>
-                <a:spcPct val="140000"/>
-              </a:lnSpc>
-              <a:buFont typeface="Arial"/>
-              <a:buChar char="●"/>
-            </a:pPr>
-            <a:r>
-              <a:rPr b="0" sz="1800">
-                <a:solidFill>
-                  <a:srgbClr val="222222"/>
-                </a:solidFill>
-                <a:latin typeface="メイリオ"/>
-                <a:ea typeface="メイリオ"/>
-              </a:rPr>
-              <a:t>tests/mock_data.py に 5 カテゴリ × 5 件のサンプル（強調記法 [[]] / __ 含む）</a:t>
             </a:r>
           </a:p>
         </p:txBody>

--- a/docs/architecture.pptx
+++ b/docs/architecture.pptx
@@ -2873,7 +2873,7 @@
           <a:lstStyle/>
           <a:p>
             <a:pPr algn="r"/>
-            <a:fld id="{1CF40720-7B4F-485C-B2CB-906E457782F0}" type="slidenum">
+            <a:fld id="{76D13BF0-27D2-4253-BF31-14C16AE875D6}" type="slidenum">
               <a:rPr lang="ja-JP" sz="1300" b="0">
                 <a:solidFill>
                   <a:srgbClr val="222222"/>
@@ -7810,7 +7810,7 @@
                 <a:latin typeface="メイリオ"/>
                 <a:ea typeface="メイリオ"/>
               </a:rPr>
-              <a:t>10 件 / カテゴリ</a:t>
+              <a:t>5 件 / カテゴリ</a:t>
             </a:r>
           </a:p>
           <a:p>
@@ -11398,7 +11398,7 @@
                 <a:latin typeface="メイリオ"/>
                 <a:ea typeface="メイリオ"/>
               </a:rPr>
-              <a:t>Runner は記事要約と同じターンで entities/topics/industries/events を JSON 出力 → tags[] に階層化して frontmatter / 記事カード行内 / articles.jsonl に展開</a:t>
+              <a:t>Runner は記事要約と同じターンで entities/topics/industries/events を JSON 出力 → tags[] に階層化</a:t>
             </a:r>
           </a:p>
           <a:p>
@@ -11420,7 +11420,7 @@
                 <a:latin typeface="メイリオ"/>
                 <a:ea typeface="メイリオ"/>
               </a:rPr>
-              <a:t>正本仕様: prompts/obsidian-tagging-spec.md（毎回 Read で読み込む）</a:t>
+              <a:t>frontmatter は cat/co/country/person のみ集約。記事カード行は 4〜7 個に絞る（圧縮版）。詳細: prompts/obsidian-tagging-spec.md</a:t>
             </a:r>
           </a:p>
         </p:txBody>
@@ -14668,7 +14668,7 @@
                 <a:latin typeface="メイリオ"/>
                 <a:ea typeface="メイリオ"/>
               </a:rPr>
-              <a:t>5 カテゴリ × 10 件 + 5 セクション考察 + サムネ OGP 取得で約 80-120k トークン入力 / 8-12k トークン出力</a:t>
+              <a:t>5 カテゴリ × 5 件 + 5 セクション考察 + サムネ OGP 取得で約 50-70k トークン入力 / 6-9k トークン出力</a:t>
             </a:r>
           </a:p>
         </p:txBody>
